--- a/Development_D6/D6-L12_Review_and_Unit_Assessment_Countries_Cultures_Celebrations.pptx
+++ b/Development_D6/D6-L12_Review_and_Unit_Assessment_Countries_Cultures_Celebrations.pptx
@@ -526,7 +526,11 @@
           <a:lstStyle/>
           <a:p>
             <a:r>
-              <a:rPr lang="en-US" dirty="0"/>
+              <a:rPr lang="ar-SA" dirty="0">
+                <a:latin typeface="Amiri" pitchFamily="2" charset="-78"/>
+                <a:ea typeface="Amiri" pitchFamily="2" charset="-78"/>
+                <a:cs typeface="Amiri" pitchFamily="2" charset="-78"/>
+              </a:rPr>
               <a:t>LESSON AT A GLANCE — planned for 56 minutes, leaving about 4 minutes for Teams delays.
 0–1 Welcome · 1–2 Map · 2–6 Grammar spine (not marked) · 6–7 Assessment map · 7–21 Listening (20) · 21–29 Reading (10) · 29–46 Writing (20) · 46–56 Speaking (10, one-to-one or trusted pairs) · 56–60 Profile and P1 target.
 FLEX slides are optional. Use them if the class is moving quickly; otherwise the same activities are on the website for homework.
@@ -626,7 +630,11 @@
           <a:lstStyle/>
           <a:p>
             <a:r>
-              <a:rPr lang="en-US" dirty="0"/>
+              <a:rPr lang="ar-SA" dirty="0">
+                <a:latin typeface="Amiri" pitchFamily="2" charset="-78"/>
+                <a:ea typeface="Amiri" pitchFamily="2" charset="-78"/>
+                <a:cs typeface="Amiri" pitchFamily="2" charset="-78"/>
+              </a:rPr>
               <a:t>LISTENING TEXT 1 · QUESTIONS 5–8 (website Part A, 20 marks). Before listening: mark each question P / N / F and circle “who” and “all / some” questions (D6-L10). Each recording may be played twice; students answer after the second reading.
 SCRIPT: فِي الطُّفُولَةِ كُنَّا نَحْتَفِلُ بِالعِيدِ فِي بَلَدِ أُسْرَتِي، وَكَانَتْ جَدَّتِي تُعِدُّ الحَلْوَى بِنَفْسِهَا. وَفِي العَامِ المَاضِي زُرْنَا الأَقَارِبَ هُنَاكَ بَعْدَ غِيَابٍ طَوِيلٍ، وَوَزَّعَ أَبِي العِيدِيَّةَ عَلَى الأَطْفَالِ. أَمَّا الآنَ فَنَحْتَفِلُ عَادَةً فِي المَرْكَزِ الثَّقَافِيِّ مَعَ الجَالِيَةِ، وَتُزَيَّنُ القَاعَةُ وَتُتَبَادَلُ التَّهَانِي. وَفِي بَعْضِ العَائِلَاتِ تُوَزَّعُ العِيدِيَّةُ، وَلٰكِنْ لَيْسَ دَائِمًا؛ فَالعَادَاتُ تَخْتَلِفُ. وَالعَامَ القَادِمَ سَنُنَظِّمُ حَفْلًا أَكْبَرَ، وَسَنَدْعُو الجِيرَانَ لِكَيْ يَتَعَرَّفُوا عَلَى تَقَالِيدِنَا. وَأَطْمَحُ إِلَى أَنْ أَزُورَ بَلَدَ أُسْرَتِي مَرَّةً أُخْرَى.
 Private chat: 4 letters.</a:t>
@@ -804,7 +812,11 @@
           <a:lstStyle/>
           <a:p>
             <a:r>
-              <a:rPr lang="en-US" dirty="0"/>
+              <a:rPr lang="ar-SA" dirty="0">
+                <a:latin typeface="Amiri" pitchFamily="2" charset="-78"/>
+                <a:ea typeface="Amiri" pitchFamily="2" charset="-78"/>
+                <a:cs typeface="Amiri" pitchFamily="2" charset="-78"/>
+              </a:rPr>
               <a:t>LISTENING TEXT 2 · 6 QUESTIONS (website Part A, 20 marks). Before listening: mark each question P / N / F and circle “who” and “all / some” questions (D6-L10). Each recording may be played twice; students answer after the second reading.
 SCRIPT: نُورُ: أَنَا مِنَ الجِيلِ الثَّانِي، وَأَنْتَمِي إِلَى ثَقَافَتَيْنِ. أَتَحَدَّثُ العَرَبِيَّةَ فِي البَيْتِ. سَامِي: وَأَنَا وُلِدْتُ هُنَاكَ وَجِئْتُ صَغِيرًا، وَتَكَيَّفْتُ مَعَ الحَيَاةِ هُنَا بِسُرْعَةٍ. نُورُ: أَحْتَفِظُ بِعَادَاتِ أُسْرَتِي، وَخَاصَّةً فِي المُنَاسَبَاتِ. سَامِي: وَأَنَا أَيْضًا أَحْتَفِظُ بِهَا، وَلٰكِنَّنِي أَحْيَانًا أَخْلِطُ بَيْنَ اللُّغَتَيْنِ. نُورُ: أَنَا كَذٰلِكَ! وَهٰذَا طَبِيعِيٌّ وَلَيْسَ مُشْكِلَةً. سَامِي: أَحِنُّ إِلَى وَطَنِي أَحْيَانًا. نُورُ: وَأَنَا لَمْ أَعِشْ هُنَاكَ، وَلٰكِنِّي أَشْعُرُ بِالانْتِمَاءِ إِلَيْهِ.
 Private chat: 6 letters.</a:t>
@@ -982,7 +994,11 @@
           <a:lstStyle/>
           <a:p>
             <a:r>
-              <a:rPr lang="en-US" dirty="0"/>
+              <a:rPr lang="ar-SA" dirty="0">
+                <a:latin typeface="Amiri" pitchFamily="2" charset="-78"/>
+                <a:ea typeface="Amiri" pitchFamily="2" charset="-78"/>
+                <a:cs typeface="Amiri" pitchFamily="2" charset="-78"/>
+              </a:rPr>
               <a:t>LISTENING TEXT 3 · 6 QUESTIONS (website Part A, 20 marks). Before listening: mark each question P / N / F and circle “who” and “all / some” questions (D6-L10). Each recording may be played twice; students answer after the second reading.
 SCRIPT: تُعَدُّ العَرَبِيَّةُ مِنْ أَوْسَعِ اللُّغَاتِ انْتِشَارًا، وَهِيَ إِحْدَى لُغَاتِ الأُمَمِ المُتَّحِدَةِ الرَّسْمِيَّةِ. وَتَضُمُّ المِنْطَقَةُ اثْنَتَيْنِ وَعِشْرِينَ دَوْلَةً تَخْتَلِفُ لَهَجَاتُهَا، بَيْنَمَا تَجْمَعُهَا الفُصْحَى فِي الكِتَابَةِ وَالإِعْلَامِ. وَإِلَى جَانِبِ العَرَبِيَّةِ تُوجَدُ لُغَاتٌ رَسْمِيَّةٌ أُخْرَى، مِثْلُ الأَمَازِيغِيَّةِ فِي المَغْرِبِ وَالجَزَائِرِ. وَقَدِ انْتَقَلَتْ كَلِمَاتٌ عَرَبِيَّةٌ إِلَى لُغَاتٍ أُخْرَى عَبْرَ التِّجَارَةِ وَالتَّرْجَمَةِ. وَيُشَارُ إِلَى أَنَّ التَّنَوُّعَ الثَّقَافِيَّ وَالدِّينِيَّ قَدِيمٌ فِي المِنْطَقَةِ، وَلَيْسَ صَحِيحًا أَنَّهَا ذَاتُ ثَقَافَةٍ وَاحِدَةٍ.
 Private chat: 6 letters.</a:t>
@@ -1512,7 +1528,11 @@
           <a:lstStyle/>
           <a:p>
             <a:r>
-              <a:rPr lang="en-US" dirty="0"/>
+              <a:rPr lang="ar-SA" dirty="0">
+                <a:latin typeface="Amiri" pitchFamily="2" charset="-78"/>
+                <a:ea typeface="Amiri" pitchFamily="2" charset="-78"/>
+                <a:cs typeface="Amiri" pitchFamily="2" charset="-78"/>
+              </a:rPr>
               <a:t>WELCOME (1 min) — while students join.
 • Greet each student by name as they arrive: السَّلَامُ عَلَيْكُمْ. Take the register (Pastoral Tracker: attendance 0/1).
 • 2-MINUTE CHECK-IN (SEND training): a private chat to any student who seemed unsettled last lesson — “Are you okay today? 👍 / 👎”.
@@ -1693,7 +1713,11 @@
           <a:lstStyle/>
           <a:p>
             <a:r>
-              <a:rPr lang="en-US" dirty="0"/>
+              <a:rPr lang="ar-SA" dirty="0">
+                <a:latin typeface="Amiri" pitchFamily="2" charset="-78"/>
+                <a:ea typeface="Amiri" pitchFamily="2" charset="-78"/>
+                <a:cs typeface="Amiri" pitchFamily="2" charset="-78"/>
+              </a:rPr>
               <a:t>WRITING QUESTION 1 (website, 5 marks): one mark per field completed accurately in Arabic (a phrase is enough). Field 3 must use يَحْتَفِلُ بِـ with the preposition for the mark; field 5 rewards أَطْمَحُ إِلَى / أَتَمَنَّى أَنْ.</a:t>
             </a:r>
             <a:endParaRPr lang="en-US" dirty="0"/>
@@ -1781,7 +1805,11 @@
           <a:lstStyle/>
           <a:p>
             <a:r>
-              <a:rPr lang="en-US" dirty="0"/>
+              <a:rPr lang="ar-SA" dirty="0">
+                <a:latin typeface="Amiri" pitchFamily="2" charset="-78"/>
+                <a:ea typeface="Amiri" pitchFamily="2" charset="-78"/>
+                <a:cs typeface="Amiri" pitchFamily="2" charset="-78"/>
+              </a:rPr>
               <a:t>WRITING QUESTION 2 (website, 15 marks): write 130–140 words on ثَقَافَتِي وَهُوِيَّتِي — describe your background, narrate a past cultural experience (3+ events), give an opinion and state a future aspiration. Mark scheme exactly as on the website. The D6-L09 website model is a full-mark exemplar — show it ONLY after writing.</a:t>
             </a:r>
             <a:endParaRPr lang="en-US" dirty="0"/>
@@ -1869,7 +1897,11 @@
           <a:lstStyle/>
           <a:p>
             <a:r>
-              <a:rPr lang="en-US" dirty="0"/>
+              <a:rPr lang="ar-SA" dirty="0">
+                <a:latin typeface="Amiri" pitchFamily="2" charset="-78"/>
+                <a:ea typeface="Amiri" pitchFamily="2" charset="-78"/>
+                <a:cs typeface="Amiri" pitchFamily="2" charset="-78"/>
+              </a:rPr>
               <a:t>ROLE PLAY (website, 4 marks). Teacher plays a visitor from another culture: مَرْحَبًا! أَنَا مِنْ اليَابَانِ، وَأَنْتَ؟ Answers to model: أَنَا مِنَ الجِيلِ الثَّانِي، وَأَنْتَمِي إِلَى ثَقَافَتَيْنِ … · فِي العِيدِ تُتَبَادَلُ التَّهَانِي … · وَأَنْتَ، كَيْفَ تَحْتَفِلُونَ فِي بَلَدِكَ؟ · تَعَلَّمْتُ مِنْ صَدِيقِي أَنَّ … Listen for the preposition on every cultural verb. To a girl: عَرِّفِي · صِفِي · اِسْأَلِي · اُذْكُرِي.</a:t>
             </a:r>
             <a:endParaRPr lang="en-US" dirty="0"/>
@@ -1957,7 +1989,11 @@
           <a:lstStyle/>
           <a:p>
             <a:r>
-              <a:rPr lang="en-US" dirty="0"/>
+              <a:rPr lang="ar-SA" dirty="0">
+                <a:latin typeface="Amiri" pitchFamily="2" charset="-78"/>
+                <a:ea typeface="Amiri" pitchFamily="2" charset="-78"/>
+                <a:cs typeface="Amiri" pitchFamily="2" charset="-78"/>
+              </a:rPr>
               <a:t>TOPIC CONVERSATION (website, 6 marks): mirror the tense of each question and qualify cultural claims (D6-L11). Allow time-buying and repair phrases (دَعْنِي أُفَكِّرُ · عَفْوًا، أَقْصِدُ). To a girl: تُرِيدِينَ · مَرَرْتِ · حَيَاتِكِ. ORGANISATION: one-to-one while others finish writing, or trusted pairs with the teacher as examiner.</a:t>
             </a:r>
             <a:endParaRPr lang="en-US" dirty="0"/>
@@ -2671,7 +2707,11 @@
           <a:lstStyle/>
           <a:p>
             <a:r>
-              <a:rPr lang="en-US" dirty="0"/>
+              <a:rPr lang="ar-SA" dirty="0">
+                <a:latin typeface="Amiri" pitchFamily="2" charset="-78"/>
+                <a:ea typeface="Amiri" pitchFamily="2" charset="-78"/>
+                <a:cs typeface="Amiri" pitchFamily="2" charset="-78"/>
+              </a:rPr>
               <a:t>REVIEW (website twelve-question grammar spine, correct answers): زُرْنَا · كَانَتْ تُعِدُّ · سَنُنَظِّمُ · لَنْ · بِـ · إِلَى · مَعَ · تُزَيَّنُ القَاعَةُ · الَّتِي · أَكْبَرُ مِنَ السَّابِقِ · لُبْنَانَ (diptote) · أَنَّ التَّنَوُّعَ. Close the vocabulary vault during each section.</a:t>
             </a:r>
             <a:endParaRPr lang="en-US" dirty="0"/>
@@ -2847,7 +2887,11 @@
           <a:lstStyle/>
           <a:p>
             <a:r>
-              <a:rPr lang="en-US" dirty="0"/>
+              <a:rPr lang="ar-SA" dirty="0">
+                <a:latin typeface="Amiri" pitchFamily="2" charset="-78"/>
+                <a:ea typeface="Amiri" pitchFamily="2" charset="-78"/>
+                <a:cs typeface="Amiri" pitchFamily="2" charset="-78"/>
+              </a:rPr>
               <a:t>LISTENING TEXT 1 · QUESTIONS 1–4 (website Part A, 20 marks). Before listening: mark each question P / N / F and circle “who” and “all / some” questions (D6-L10). Each recording may be played twice; students answer after the second reading.
 SCRIPT: فِي الطُّفُولَةِ كُنَّا نَحْتَفِلُ بِالعِيدِ فِي بَلَدِ أُسْرَتِي، وَكَانَتْ جَدَّتِي تُعِدُّ الحَلْوَى بِنَفْسِهَا. وَفِي العَامِ المَاضِي زُرْنَا الأَقَارِبَ هُنَاكَ بَعْدَ غِيَابٍ طَوِيلٍ، وَوَزَّعَ أَبِي العِيدِيَّةَ عَلَى الأَطْفَالِ. أَمَّا الآنَ فَنَحْتَفِلُ عَادَةً فِي المَرْكَزِ الثَّقَافِيِّ مَعَ الجَالِيَةِ، وَتُزَيَّنُ القَاعَةُ وَتُتَبَادَلُ التَّهَانِي. وَفِي بَعْضِ العَائِلَاتِ تُوَزَّعُ العِيدِيَّةُ، وَلٰكِنْ لَيْسَ دَائِمًا؛ فَالعَادَاتُ تَخْتَلِفُ. وَالعَامَ القَادِمَ سَنُنَظِّمُ حَفْلًا أَكْبَرَ، وَسَنَدْعُو الجِيرَانَ لِكَيْ يَتَعَرَّفُوا عَلَى تَقَالِيدِنَا. وَأَطْمَحُ إِلَى أَنْ أَزُورَ بَلَدَ أُسْرَتِي مَرَّةً أُخْرَى.
 Private chat: 4 letters.</a:t>
@@ -3421,6 +3465,7 @@
                   <a:srgbClr val="D4AF37"/>
                 </a:solidFill>
                 <a:latin typeface="Amiri" pitchFamily="2" charset="-78"/>
+                <a:ea typeface="Amiri" pitchFamily="2" charset="-78"/>
                 <a:cs typeface="Amiri" pitchFamily="2" charset="-78"/>
               </a:rPr>
               <a:t>م</a:t>
@@ -3627,6 +3672,7 @@
                   <a:srgbClr val="D4AF37"/>
                 </a:solidFill>
                 <a:latin typeface="Amiri" pitchFamily="2" charset="-78"/>
+                <a:ea typeface="Amiri" pitchFamily="2" charset="-78"/>
                 <a:cs typeface="Amiri" pitchFamily="2" charset="-78"/>
               </a:rPr>
               <a:t>المُرَاجَعَةُ وَتَقْيِيمُ الوَحْدَةِ</a:t>
@@ -4084,6 +4130,7 @@
                   <a:srgbClr val="D4AF37"/>
                 </a:solidFill>
                 <a:latin typeface="Amiri" pitchFamily="2" charset="-78"/>
+                <a:ea typeface="Amiri" pitchFamily="2" charset="-78"/>
                 <a:cs typeface="Amiri" pitchFamily="2" charset="-78"/>
               </a:rPr>
               <a:t>م</a:t>
@@ -4404,6 +4451,7 @@
                   <a:srgbClr val="8A6D1E"/>
                 </a:solidFill>
                 <a:latin typeface="Amiri" pitchFamily="2" charset="-78"/>
+                <a:ea typeface="Amiri" pitchFamily="2" charset="-78"/>
                 <a:cs typeface="Amiri" pitchFamily="2" charset="-78"/>
               </a:rPr>
               <a:t>الاِسْتِمَاعُ</a:t>
@@ -5904,6 +5952,7 @@
                   <a:srgbClr val="1B3B6F"/>
                 </a:solidFill>
                 <a:latin typeface="Amiri" pitchFamily="2" charset="-78"/>
+                <a:ea typeface="Amiri" pitchFamily="2" charset="-78"/>
                 <a:cs typeface="Amiri" pitchFamily="2" charset="-78"/>
               </a:rPr>
               <a:t>العِيدِيَّة</a:t>
@@ -6353,6 +6402,7 @@
                   <a:srgbClr val="D4AF37"/>
                 </a:solidFill>
                 <a:latin typeface="Amiri" pitchFamily="2" charset="-78"/>
+                <a:ea typeface="Amiri" pitchFamily="2" charset="-78"/>
                 <a:cs typeface="Amiri" pitchFamily="2" charset="-78"/>
               </a:rPr>
               <a:t>م</a:t>
@@ -6673,6 +6723,7 @@
                   <a:srgbClr val="8A6D1E"/>
                 </a:solidFill>
                 <a:latin typeface="Amiri" pitchFamily="2" charset="-78"/>
+                <a:ea typeface="Amiri" pitchFamily="2" charset="-78"/>
                 <a:cs typeface="Amiri" pitchFamily="2" charset="-78"/>
               </a:rPr>
               <a:t>الإِجَابَاتُ</a:t>
@@ -7214,6 +7265,7 @@
                   <a:srgbClr val="8A6D1E"/>
                 </a:solidFill>
                 <a:latin typeface="Amiri" pitchFamily="2" charset="-78"/>
+                <a:ea typeface="Amiri" pitchFamily="2" charset="-78"/>
                 <a:cs typeface="Amiri" pitchFamily="2" charset="-78"/>
               </a:rPr>
               <a:t>وَتُزَيَّنُ القَاعَةُ وَتُتَبَادَلُ التَّهَانِي.</a:t>
@@ -7717,6 +7769,7 @@
                   <a:srgbClr val="8A6D1E"/>
                 </a:solidFill>
                 <a:latin typeface="Amiri" pitchFamily="2" charset="-78"/>
+                <a:ea typeface="Amiri" pitchFamily="2" charset="-78"/>
                 <a:cs typeface="Amiri" pitchFamily="2" charset="-78"/>
               </a:rPr>
               <a:t>وَالعَامَ القَادِمَ سَنُنَظِّمُ حَفْلًا أَكْبَرَ، وَسَنَدْعُو الجِيرَانَ.</a:t>
@@ -8220,6 +8273,7 @@
                   <a:srgbClr val="8A6D1E"/>
                 </a:solidFill>
                 <a:latin typeface="Amiri" pitchFamily="2" charset="-78"/>
+                <a:ea typeface="Amiri" pitchFamily="2" charset="-78"/>
                 <a:cs typeface="Amiri" pitchFamily="2" charset="-78"/>
               </a:rPr>
               <a:t>وَأَطْمَحُ إِلَى أَنْ أَزُورَ بَلَدَ أُسْرَتِي مَرَّةً أُخْرَى.</a:t>
@@ -8368,6 +8422,7 @@
                   <a:srgbClr val="1B3B6F"/>
                 </a:solidFill>
                 <a:latin typeface="Amiri" pitchFamily="2" charset="-78"/>
+                <a:ea typeface="Amiri" pitchFamily="2" charset="-78"/>
                 <a:cs typeface="Amiri" pitchFamily="2" charset="-78"/>
               </a:rPr>
               <a:t>العِيدِيَّة</a:t>
@@ -8749,6 +8804,7 @@
                   <a:srgbClr val="8A6D1E"/>
                 </a:solidFill>
                 <a:latin typeface="Amiri" pitchFamily="2" charset="-78"/>
+                <a:ea typeface="Amiri" pitchFamily="2" charset="-78"/>
                 <a:cs typeface="Amiri" pitchFamily="2" charset="-78"/>
               </a:rPr>
               <a:t>العِيدِيَّة</a:t>
@@ -8895,6 +8951,7 @@
                   <a:srgbClr val="D4AF37"/>
                 </a:solidFill>
                 <a:latin typeface="Amiri" pitchFamily="2" charset="-78"/>
+                <a:ea typeface="Amiri" pitchFamily="2" charset="-78"/>
                 <a:cs typeface="Amiri" pitchFamily="2" charset="-78"/>
               </a:rPr>
               <a:t>م</a:t>
@@ -9215,6 +9272,7 @@
                   <a:srgbClr val="8A6D1E"/>
                 </a:solidFill>
                 <a:latin typeface="Amiri" pitchFamily="2" charset="-78"/>
+                <a:ea typeface="Amiri" pitchFamily="2" charset="-78"/>
                 <a:cs typeface="Amiri" pitchFamily="2" charset="-78"/>
               </a:rPr>
               <a:t>الاِسْتِمَاعُ</a:t>
@@ -12014,6 +12072,7 @@
                   <a:srgbClr val="D4AF37"/>
                 </a:solidFill>
                 <a:latin typeface="Amiri" pitchFamily="2" charset="-78"/>
+                <a:ea typeface="Amiri" pitchFamily="2" charset="-78"/>
                 <a:cs typeface="Amiri" pitchFamily="2" charset="-78"/>
               </a:rPr>
               <a:t>م</a:t>
@@ -12334,6 +12393,7 @@
                   <a:srgbClr val="8A6D1E"/>
                 </a:solidFill>
                 <a:latin typeface="Amiri" pitchFamily="2" charset="-78"/>
+                <a:ea typeface="Amiri" pitchFamily="2" charset="-78"/>
                 <a:cs typeface="Amiri" pitchFamily="2" charset="-78"/>
               </a:rPr>
               <a:t>الإِجَابَاتُ</a:t>
@@ -12875,6 +12935,7 @@
                   <a:srgbClr val="8A6D1E"/>
                 </a:solidFill>
                 <a:latin typeface="Amiri" pitchFamily="2" charset="-78"/>
+                <a:ea typeface="Amiri" pitchFamily="2" charset="-78"/>
                 <a:cs typeface="Amiri" pitchFamily="2" charset="-78"/>
               </a:rPr>
               <a:t>نُورُ: أَنَا مِنَ الجِيلِ الثَّانِي.</a:t>
@@ -13378,6 +13439,7 @@
                   <a:srgbClr val="8A6D1E"/>
                 </a:solidFill>
                 <a:latin typeface="Amiri" pitchFamily="2" charset="-78"/>
+                <a:ea typeface="Amiri" pitchFamily="2" charset="-78"/>
                 <a:cs typeface="Amiri" pitchFamily="2" charset="-78"/>
               </a:rPr>
               <a:t>سَامِي: وَأَنَا وُلِدْتُ هُنَاكَ.</a:t>
@@ -13894,6 +13956,7 @@
                   <a:srgbClr val="8A6D1E"/>
                 </a:solidFill>
                 <a:latin typeface="Amiri" pitchFamily="2" charset="-78"/>
+                <a:ea typeface="Amiri" pitchFamily="2" charset="-78"/>
                 <a:cs typeface="Amiri" pitchFamily="2" charset="-78"/>
               </a:rPr>
               <a:t>أَحْتَفِظُ بِعَادَاتِ أُسْرَتِي</a:t>
@@ -13920,6 +13983,7 @@
                   <a:srgbClr val="8A6D1E"/>
                 </a:solidFill>
                 <a:latin typeface="Amiri" pitchFamily="2" charset="-78"/>
+                <a:ea typeface="Amiri" pitchFamily="2" charset="-78"/>
                 <a:cs typeface="Amiri" pitchFamily="2" charset="-78"/>
               </a:rPr>
               <a:t>وَأَنَا أَيْضًا أَحْتَفِظُ بِهَا</a:t>
@@ -14449,6 +14513,7 @@
                   <a:srgbClr val="8A6D1E"/>
                 </a:solidFill>
                 <a:latin typeface="Amiri" pitchFamily="2" charset="-78"/>
+                <a:ea typeface="Amiri" pitchFamily="2" charset="-78"/>
                 <a:cs typeface="Amiri" pitchFamily="2" charset="-78"/>
               </a:rPr>
               <a:t>أَحْيَانًا أَخْلِطُ بَيْنَ اللُّغَتَيْنِ</a:t>
@@ -14475,6 +14540,7 @@
                   <a:srgbClr val="8A6D1E"/>
                 </a:solidFill>
                 <a:latin typeface="Amiri" pitchFamily="2" charset="-78"/>
+                <a:ea typeface="Amiri" pitchFamily="2" charset="-78"/>
                 <a:cs typeface="Amiri" pitchFamily="2" charset="-78"/>
               </a:rPr>
               <a:t>أَنَا كَذٰلِكَ</a:t>
@@ -14991,6 +15057,7 @@
                   <a:srgbClr val="8A6D1E"/>
                 </a:solidFill>
                 <a:latin typeface="Amiri" pitchFamily="2" charset="-78"/>
+                <a:ea typeface="Amiri" pitchFamily="2" charset="-78"/>
                 <a:cs typeface="Amiri" pitchFamily="2" charset="-78"/>
               </a:rPr>
               <a:t>سَامِي: أَحِنُّ إِلَى وَطَنِي أَحْيَانًا.</a:t>
@@ -15494,6 +15561,7 @@
                   <a:srgbClr val="8A6D1E"/>
                 </a:solidFill>
                 <a:latin typeface="Amiri" pitchFamily="2" charset="-78"/>
+                <a:ea typeface="Amiri" pitchFamily="2" charset="-78"/>
                 <a:cs typeface="Amiri" pitchFamily="2" charset="-78"/>
               </a:rPr>
               <a:t>نُورُ: وَأَنَا لَمْ أَعِشْ هُنَاكَ.</a:t>
@@ -15627,6 +15695,7 @@
                   <a:srgbClr val="D4AF37"/>
                 </a:solidFill>
                 <a:latin typeface="Amiri" pitchFamily="2" charset="-78"/>
+                <a:ea typeface="Amiri" pitchFamily="2" charset="-78"/>
                 <a:cs typeface="Amiri" pitchFamily="2" charset="-78"/>
               </a:rPr>
               <a:t>م</a:t>
@@ -15947,6 +16016,7 @@
                   <a:srgbClr val="8A6D1E"/>
                 </a:solidFill>
                 <a:latin typeface="Amiri" pitchFamily="2" charset="-78"/>
+                <a:ea typeface="Amiri" pitchFamily="2" charset="-78"/>
                 <a:cs typeface="Amiri" pitchFamily="2" charset="-78"/>
               </a:rPr>
               <a:t>الاِسْتِمَاعُ</a:t>
@@ -18746,6 +18816,7 @@
                   <a:srgbClr val="D4AF37"/>
                 </a:solidFill>
                 <a:latin typeface="Amiri" pitchFamily="2" charset="-78"/>
+                <a:ea typeface="Amiri" pitchFamily="2" charset="-78"/>
                 <a:cs typeface="Amiri" pitchFamily="2" charset="-78"/>
               </a:rPr>
               <a:t>م</a:t>
@@ -19066,6 +19137,7 @@
                   <a:srgbClr val="8A6D1E"/>
                 </a:solidFill>
                 <a:latin typeface="Amiri" pitchFamily="2" charset="-78"/>
+                <a:ea typeface="Amiri" pitchFamily="2" charset="-78"/>
                 <a:cs typeface="Amiri" pitchFamily="2" charset="-78"/>
               </a:rPr>
               <a:t>الإِجَابَاتُ</a:t>
@@ -19607,6 +19679,7 @@
                   <a:srgbClr val="8A6D1E"/>
                 </a:solidFill>
                 <a:latin typeface="Amiri" pitchFamily="2" charset="-78"/>
+                <a:ea typeface="Amiri" pitchFamily="2" charset="-78"/>
                 <a:cs typeface="Amiri" pitchFamily="2" charset="-78"/>
               </a:rPr>
               <a:t>وَهِيَ إِحْدَى لُغَاتِ الأُمَمِ المُتَّحِدَةِ الرَّسْمِيَّةِ.</a:t>
@@ -20110,6 +20183,7 @@
                   <a:srgbClr val="8A6D1E"/>
                 </a:solidFill>
                 <a:latin typeface="Amiri" pitchFamily="2" charset="-78"/>
+                <a:ea typeface="Amiri" pitchFamily="2" charset="-78"/>
                 <a:cs typeface="Amiri" pitchFamily="2" charset="-78"/>
               </a:rPr>
               <a:t>وَتَضُمُّ المِنْطَقَةُ اثْنَتَيْنِ وَعِشْرِينَ دَوْلَةً.</a:t>
@@ -20613,6 +20687,7 @@
                   <a:srgbClr val="8A6D1E"/>
                 </a:solidFill>
                 <a:latin typeface="Amiri" pitchFamily="2" charset="-78"/>
+                <a:ea typeface="Amiri" pitchFamily="2" charset="-78"/>
                 <a:cs typeface="Amiri" pitchFamily="2" charset="-78"/>
               </a:rPr>
               <a:t>تَخْتَلِفُ لَهَجَاتُهَا، بَيْنَمَا تَجْمَعُهَا الفُصْحَى فِي الكِتَابَةِ وَالإِعْلَامِ.</a:t>
@@ -21116,6 +21191,7 @@
                   <a:srgbClr val="8A6D1E"/>
                 </a:solidFill>
                 <a:latin typeface="Amiri" pitchFamily="2" charset="-78"/>
+                <a:ea typeface="Amiri" pitchFamily="2" charset="-78"/>
                 <a:cs typeface="Amiri" pitchFamily="2" charset="-78"/>
               </a:rPr>
               <a:t>مِثْلُ الأَمَازِيغِيَّةِ فِي المَغْرِبِ وَالجَزَائِرِ.</a:t>
@@ -21619,6 +21695,7 @@
                   <a:srgbClr val="8A6D1E"/>
                 </a:solidFill>
                 <a:latin typeface="Amiri" pitchFamily="2" charset="-78"/>
+                <a:ea typeface="Amiri" pitchFamily="2" charset="-78"/>
                 <a:cs typeface="Amiri" pitchFamily="2" charset="-78"/>
               </a:rPr>
               <a:t>وَقَدِ انْتَقَلَتْ كَلِمَاتٌ عَرَبِيَّةٌ إِلَى لُغَاتٍ أُخْرَى عَبْرَ التِّجَارَةِ وَالتَّرْجَمَةِ.</a:t>
@@ -22122,6 +22199,7 @@
                   <a:srgbClr val="8A6D1E"/>
                 </a:solidFill>
                 <a:latin typeface="Amiri" pitchFamily="2" charset="-78"/>
+                <a:ea typeface="Amiri" pitchFamily="2" charset="-78"/>
                 <a:cs typeface="Amiri" pitchFamily="2" charset="-78"/>
               </a:rPr>
               <a:t>وَلَيْسَ صَحِيحًا أَنَّهَا ذَاتُ ثَقَافَةٍ وَاحِدَةٍ.</a:t>
@@ -22255,6 +22333,7 @@
                   <a:srgbClr val="D4AF37"/>
                 </a:solidFill>
                 <a:latin typeface="Amiri" pitchFamily="2" charset="-78"/>
+                <a:ea typeface="Amiri" pitchFamily="2" charset="-78"/>
                 <a:cs typeface="Amiri" pitchFamily="2" charset="-78"/>
               </a:rPr>
               <a:t>م</a:t>
@@ -22575,6 +22654,7 @@
                   <a:srgbClr val="8A6D1E"/>
                 </a:solidFill>
                 <a:latin typeface="Amiri" pitchFamily="2" charset="-78"/>
+                <a:ea typeface="Amiri" pitchFamily="2" charset="-78"/>
                 <a:cs typeface="Amiri" pitchFamily="2" charset="-78"/>
               </a:rPr>
               <a:t>مَدِينَةُ المِهْرَجَانَاتِ</a:t>
@@ -22688,6 +22768,7 @@
                   <a:srgbClr val="1F2A37"/>
                 </a:solidFill>
                 <a:latin typeface="Amiri" pitchFamily="2" charset="-78"/>
+                <a:ea typeface="Amiri" pitchFamily="2" charset="-78"/>
                 <a:cs typeface="Amiri" pitchFamily="2" charset="-78"/>
               </a:rPr>
               <a:t>فِي بَلَدِنَا تُقَامُ مِهْرَجَانَاتٌ ثَقَافِيَّةٌ كُلَّ صَيْفٍ فِي مَسَارِحَ أَثَرِيَّةٍ. وَقَدْ حَضَرْتُ العَامَ المَاضِي وَاحِدًا مِنْهَا مَعَ أُسْرَتِي، وَشَاهَدْنَا عُرُوضَ الرَّقْصِ الشَّعْبِيِّ وَالمُوسِيقَى التَّقْلِيدِيَّةِ. زُيِّنَتِ السَّاحَاتُ بِالأَضْوَاءِ، وَتُبُودِلَتِ الأَطْعِمَةُ بَيْنَ العَائِلَاتِ. وَتَحْتَفِلُ فِي المَدِينَةِ نَفْسِهَا طَوَائِفُ مُخْتَلِفَةٌ بِمُنَاسَبَاتِهَا؛ فَيُقَامُ القُدَّاسُ فِي الكَنِيسَةِ القَدِيمَةِ، وَتُزَيَّنُ البُيُوتُ فِي الأَعْيَادِ الأُخْرَى. وَمِنْ وِجْهَةِ نَظَرِي لَا يُمْكِنُ إِنْكَارُ أَنَّ هٰذَا التَّنَوُّعَ ثَرْوَةٌ حَقِيقِيَّةٌ. عَلَى الرَّغْمِ مِنْ ذٰلِكَ لَا يَذْكُرُ كَثِيرٌ مِنَ الزُّوَّارِ سِوَى الجَانِبِ السِّيَاحِيِّ. وَفِي المُسْتَقْبَلِ سَأَعُودُ إِلَى المِهْرَجَانِ، وَأَطْمَحُ إِلَى أَنْ أُشَارِكَ فِي تَنْظِيمِهِ.</a:t>
@@ -22821,6 +22902,7 @@
                   <a:srgbClr val="D4AF37"/>
                 </a:solidFill>
                 <a:latin typeface="Amiri" pitchFamily="2" charset="-78"/>
+                <a:ea typeface="Amiri" pitchFamily="2" charset="-78"/>
                 <a:cs typeface="Amiri" pitchFamily="2" charset="-78"/>
               </a:rPr>
               <a:t>م</a:t>
@@ -23141,6 +23223,7 @@
                   <a:srgbClr val="8A6D1E"/>
                 </a:solidFill>
                 <a:latin typeface="Amiri" pitchFamily="2" charset="-78"/>
+                <a:ea typeface="Amiri" pitchFamily="2" charset="-78"/>
                 <a:cs typeface="Amiri" pitchFamily="2" charset="-78"/>
               </a:rPr>
               <a:t>أَسْئِلَةُ القِرَاءَةِ</a:t>
@@ -25502,6 +25585,7 @@
                   <a:srgbClr val="D4AF37"/>
                 </a:solidFill>
                 <a:latin typeface="Amiri" pitchFamily="2" charset="-78"/>
+                <a:ea typeface="Amiri" pitchFamily="2" charset="-78"/>
                 <a:cs typeface="Amiri" pitchFamily="2" charset="-78"/>
               </a:rPr>
               <a:t>م</a:t>
@@ -25822,6 +25906,7 @@
                   <a:srgbClr val="8A6D1E"/>
                 </a:solidFill>
                 <a:latin typeface="Amiri" pitchFamily="2" charset="-78"/>
+                <a:ea typeface="Amiri" pitchFamily="2" charset="-78"/>
                 <a:cs typeface="Amiri" pitchFamily="2" charset="-78"/>
               </a:rPr>
               <a:t>الإِجَابَاتُ</a:t>
@@ -26363,6 +26448,7 @@
                   <a:srgbClr val="8A6D1E"/>
                 </a:solidFill>
                 <a:latin typeface="Amiri" pitchFamily="2" charset="-78"/>
+                <a:ea typeface="Amiri" pitchFamily="2" charset="-78"/>
                 <a:cs typeface="Amiri" pitchFamily="2" charset="-78"/>
               </a:rPr>
               <a:t>تُقَامُ مِهْرَجَانَاتٌ ثَقَافِيَّةٌ كُلَّ صَيْفٍ فِي مَسَارِحَ أَثَرِيَّةٍ.</a:t>
@@ -26866,6 +26952,7 @@
                   <a:srgbClr val="8A6D1E"/>
                 </a:solidFill>
                 <a:latin typeface="Amiri" pitchFamily="2" charset="-78"/>
+                <a:ea typeface="Amiri" pitchFamily="2" charset="-78"/>
                 <a:cs typeface="Amiri" pitchFamily="2" charset="-78"/>
               </a:rPr>
               <a:t>وَقَدْ حَضَرْتُ العَامَ المَاضِي وَاحِدًا مِنْهَا مَعَ أُسْرَتِي.</a:t>
@@ -27369,6 +27456,7 @@
                   <a:srgbClr val="8A6D1E"/>
                 </a:solidFill>
                 <a:latin typeface="Amiri" pitchFamily="2" charset="-78"/>
+                <a:ea typeface="Amiri" pitchFamily="2" charset="-78"/>
                 <a:cs typeface="Amiri" pitchFamily="2" charset="-78"/>
               </a:rPr>
               <a:t>شَاهَدْنَا عُرُوضَ الرَّقْصِ الشَّعْبِيِّ وَالمُوسِيقَى التَّقْلِيدِيَّةِ.</a:t>
@@ -27872,6 +27960,7 @@
                   <a:srgbClr val="8A6D1E"/>
                 </a:solidFill>
                 <a:latin typeface="Amiri" pitchFamily="2" charset="-78"/>
+                <a:ea typeface="Amiri" pitchFamily="2" charset="-78"/>
                 <a:cs typeface="Amiri" pitchFamily="2" charset="-78"/>
               </a:rPr>
               <a:t>زُيِّنَتِ السَّاحَاتُ بِالأَضْوَاءِ.</a:t>
@@ -28375,6 +28464,7 @@
                   <a:srgbClr val="8A6D1E"/>
                 </a:solidFill>
                 <a:latin typeface="Amiri" pitchFamily="2" charset="-78"/>
+                <a:ea typeface="Amiri" pitchFamily="2" charset="-78"/>
                 <a:cs typeface="Amiri" pitchFamily="2" charset="-78"/>
               </a:rPr>
               <a:t>وَتَحْتَفِلُ فِي المَدِينَةِ نَفْسِهَا طَوَائِفُ مُخْتَلِفَةٌ بِمُنَاسَبَاتِهَا.</a:t>
@@ -28508,6 +28598,7 @@
                   <a:srgbClr val="D4AF37"/>
                 </a:solidFill>
                 <a:latin typeface="Amiri" pitchFamily="2" charset="-78"/>
+                <a:ea typeface="Amiri" pitchFamily="2" charset="-78"/>
                 <a:cs typeface="Amiri" pitchFamily="2" charset="-78"/>
               </a:rPr>
               <a:t>م</a:t>
@@ -28828,6 +28919,7 @@
                   <a:srgbClr val="8A6D1E"/>
                 </a:solidFill>
                 <a:latin typeface="Amiri" pitchFamily="2" charset="-78"/>
+                <a:ea typeface="Amiri" pitchFamily="2" charset="-78"/>
                 <a:cs typeface="Amiri" pitchFamily="2" charset="-78"/>
               </a:rPr>
               <a:t>أَسْئِلَةُ القِرَاءَةِ</a:t>
@@ -29890,6 +29982,7 @@
                   <a:srgbClr val="1B3B6F"/>
                 </a:solidFill>
                 <a:latin typeface="Amiri" pitchFamily="2" charset="-78"/>
+                <a:ea typeface="Amiri" pitchFamily="2" charset="-78"/>
                 <a:cs typeface="Amiri" pitchFamily="2" charset="-78"/>
               </a:rPr>
               <a:t>زُيِّنَتْ</a:t>
@@ -30354,6 +30447,7 @@
                   <a:srgbClr val="1B3B6F"/>
                 </a:solidFill>
                 <a:latin typeface="Amiri" pitchFamily="2" charset="-78"/>
+                <a:ea typeface="Amiri" pitchFamily="2" charset="-78"/>
                 <a:cs typeface="Amiri" pitchFamily="2" charset="-78"/>
               </a:rPr>
               <a:t>وَفِي المُسْتَقْبَلِ</a:t>
@@ -30380,6 +30474,7 @@
                   <a:srgbClr val="1B3B6F"/>
                 </a:solidFill>
                 <a:latin typeface="Amiri" pitchFamily="2" charset="-78"/>
+                <a:ea typeface="Amiri" pitchFamily="2" charset="-78"/>
                 <a:cs typeface="Amiri" pitchFamily="2" charset="-78"/>
               </a:rPr>
               <a:t>إِلَى المِهْرَجَانِ</a:t>
@@ -30494,6 +30589,7 @@
                   <a:srgbClr val="1F2A37"/>
                 </a:solidFill>
                 <a:latin typeface="Amiri" pitchFamily="2" charset="-78"/>
+                <a:ea typeface="Amiri" pitchFamily="2" charset="-78"/>
                 <a:cs typeface="Amiri" pitchFamily="2" charset="-78"/>
               </a:rPr>
               <a:t>عُدْتُ</a:t>
@@ -30595,6 +30691,7 @@
                   <a:srgbClr val="1F2A37"/>
                 </a:solidFill>
                 <a:latin typeface="Amiri" pitchFamily="2" charset="-78"/>
+                <a:ea typeface="Amiri" pitchFamily="2" charset="-78"/>
                 <a:cs typeface="Amiri" pitchFamily="2" charset="-78"/>
               </a:rPr>
               <a:t>سَأَعُودُ</a:t>
@@ -30696,6 +30793,7 @@
                   <a:srgbClr val="1F2A37"/>
                 </a:solidFill>
                 <a:latin typeface="Amiri" pitchFamily="2" charset="-78"/>
+                <a:ea typeface="Amiri" pitchFamily="2" charset="-78"/>
                 <a:cs typeface="Amiri" pitchFamily="2" charset="-78"/>
               </a:rPr>
               <a:t>كُنْتُ أَعُودُ</a:t>
@@ -31267,6 +31365,7 @@
                   <a:srgbClr val="D4AF37"/>
                 </a:solidFill>
                 <a:latin typeface="Amiri" pitchFamily="2" charset="-78"/>
+                <a:ea typeface="Amiri" pitchFamily="2" charset="-78"/>
                 <a:cs typeface="Amiri" pitchFamily="2" charset="-78"/>
               </a:rPr>
               <a:t>م</a:t>
@@ -31587,6 +31686,7 @@
                   <a:srgbClr val="8A6D1E"/>
                 </a:solidFill>
                 <a:latin typeface="Amiri" pitchFamily="2" charset="-78"/>
+                <a:ea typeface="Amiri" pitchFamily="2" charset="-78"/>
                 <a:cs typeface="Amiri" pitchFamily="2" charset="-78"/>
               </a:rPr>
               <a:t>آدَابُ الصَّفِّ</a:t>
@@ -33118,6 +33218,7 @@
                   <a:srgbClr val="D4AF37"/>
                 </a:solidFill>
                 <a:latin typeface="Amiri" pitchFamily="2" charset="-78"/>
+                <a:ea typeface="Amiri" pitchFamily="2" charset="-78"/>
                 <a:cs typeface="Amiri" pitchFamily="2" charset="-78"/>
               </a:rPr>
               <a:t>م</a:t>
@@ -33438,6 +33539,7 @@
                   <a:srgbClr val="8A6D1E"/>
                 </a:solidFill>
                 <a:latin typeface="Amiri" pitchFamily="2" charset="-78"/>
+                <a:ea typeface="Amiri" pitchFamily="2" charset="-78"/>
                 <a:cs typeface="Amiri" pitchFamily="2" charset="-78"/>
               </a:rPr>
               <a:t>الإِجَابَاتُ</a:t>
@@ -33979,6 +34081,7 @@
                   <a:srgbClr val="8A6D1E"/>
                 </a:solidFill>
                 <a:latin typeface="Amiri" pitchFamily="2" charset="-78"/>
+                <a:ea typeface="Amiri" pitchFamily="2" charset="-78"/>
                 <a:cs typeface="Amiri" pitchFamily="2" charset="-78"/>
               </a:rPr>
               <a:t>لَا يُمْكِنُ إِنْكَارُ أَنَّ هٰذَا التَّنَوُّعَ ثَرْوَةٌ حَقِيقِيَّةٌ.</a:t>
@@ -34482,6 +34585,7 @@
                   <a:srgbClr val="8A6D1E"/>
                 </a:solidFill>
                 <a:latin typeface="Amiri" pitchFamily="2" charset="-78"/>
+                <a:ea typeface="Amiri" pitchFamily="2" charset="-78"/>
                 <a:cs typeface="Amiri" pitchFamily="2" charset="-78"/>
               </a:rPr>
               <a:t>لَا يَذْكُرُ كَثِيرٌ مِنَ الزُّوَّارِ سِوَى الجَانِبِ السِّيَاحِيِّ.</a:t>
@@ -34630,6 +34734,7 @@
                   <a:srgbClr val="1B3B6F"/>
                 </a:solidFill>
                 <a:latin typeface="Amiri" pitchFamily="2" charset="-78"/>
+                <a:ea typeface="Amiri" pitchFamily="2" charset="-78"/>
                 <a:cs typeface="Amiri" pitchFamily="2" charset="-78"/>
               </a:rPr>
               <a:t>زُيِّنَتْ</a:t>
@@ -35159,6 +35264,7 @@
                   <a:srgbClr val="1B3B6F"/>
                 </a:solidFill>
                 <a:latin typeface="Amiri" pitchFamily="2" charset="-78"/>
+                <a:ea typeface="Amiri" pitchFamily="2" charset="-78"/>
                 <a:cs typeface="Amiri" pitchFamily="2" charset="-78"/>
               </a:rPr>
               <a:t>وَفِي المُسْتَقْبَلِ</a:t>
@@ -35185,6 +35291,7 @@
                   <a:srgbClr val="1B3B6F"/>
                 </a:solidFill>
                 <a:latin typeface="Amiri" pitchFamily="2" charset="-78"/>
+                <a:ea typeface="Amiri" pitchFamily="2" charset="-78"/>
                 <a:cs typeface="Amiri" pitchFamily="2" charset="-78"/>
               </a:rPr>
               <a:t>إِلَى المِهْرَجَانِ</a:t>
@@ -35299,6 +35406,7 @@
                   <a:srgbClr val="9AA1AB"/>
                 </a:solidFill>
                 <a:latin typeface="Amiri" pitchFamily="2" charset="-78"/>
+                <a:ea typeface="Amiri" pitchFamily="2" charset="-78"/>
                 <a:cs typeface="Amiri" pitchFamily="2" charset="-78"/>
               </a:rPr>
               <a:t>عُدْتُ</a:t>
@@ -35427,6 +35535,7 @@
                   <a:srgbClr val="1F2A37"/>
                 </a:solidFill>
                 <a:latin typeface="Amiri" pitchFamily="2" charset="-78"/>
+                <a:ea typeface="Amiri" pitchFamily="2" charset="-78"/>
                 <a:cs typeface="Amiri" pitchFamily="2" charset="-78"/>
               </a:rPr>
               <a:t>سَأَعُودُ</a:t>
@@ -35528,6 +35637,7 @@
                   <a:srgbClr val="9AA1AB"/>
                 </a:solidFill>
                 <a:latin typeface="Amiri" pitchFamily="2" charset="-78"/>
+                <a:ea typeface="Amiri" pitchFamily="2" charset="-78"/>
                 <a:cs typeface="Amiri" pitchFamily="2" charset="-78"/>
               </a:rPr>
               <a:t>كُنْتُ أَعُودُ</a:t>
@@ -35566,6 +35676,7 @@
                   <a:srgbClr val="8A6D1E"/>
                 </a:solidFill>
                 <a:latin typeface="Amiri" pitchFamily="2" charset="-78"/>
+                <a:ea typeface="Amiri" pitchFamily="2" charset="-78"/>
                 <a:cs typeface="Amiri" pitchFamily="2" charset="-78"/>
               </a:rPr>
               <a:t>فِي المُسْتَقْبَلِ</a:t>
@@ -35592,6 +35703,7 @@
                   <a:srgbClr val="8A6D1E"/>
                 </a:solidFill>
                 <a:latin typeface="Amiri" pitchFamily="2" charset="-78"/>
+                <a:ea typeface="Amiri" pitchFamily="2" charset="-78"/>
                 <a:cs typeface="Amiri" pitchFamily="2" charset="-78"/>
               </a:rPr>
               <a:t>سَـ</a:t>
@@ -36108,6 +36220,7 @@
                   <a:srgbClr val="8A6D1E"/>
                 </a:solidFill>
                 <a:latin typeface="Amiri" pitchFamily="2" charset="-78"/>
+                <a:ea typeface="Amiri" pitchFamily="2" charset="-78"/>
                 <a:cs typeface="Amiri" pitchFamily="2" charset="-78"/>
               </a:rPr>
               <a:t>وَأَطْمَحُ إِلَى أَنْ أُشَارِكَ فِي تَنْظِيمِهِ.</a:t>
@@ -36241,6 +36354,7 @@
                   <a:srgbClr val="D4AF37"/>
                 </a:solidFill>
                 <a:latin typeface="Amiri" pitchFamily="2" charset="-78"/>
+                <a:ea typeface="Amiri" pitchFamily="2" charset="-78"/>
                 <a:cs typeface="Amiri" pitchFamily="2" charset="-78"/>
               </a:rPr>
               <a:t>م</a:t>
@@ -36561,6 +36675,7 @@
                   <a:srgbClr val="8A6D1E"/>
                 </a:solidFill>
                 <a:latin typeface="Amiri" pitchFamily="2" charset="-78"/>
+                <a:ea typeface="Amiri" pitchFamily="2" charset="-78"/>
                 <a:cs typeface="Amiri" pitchFamily="2" charset="-78"/>
               </a:rPr>
               <a:t>المِلَفُّ الثَّقَافِيُّ</a:t>
@@ -36841,6 +36956,7 @@
                   <a:srgbClr val="1B3B6F"/>
                 </a:solidFill>
                 <a:latin typeface="Amiri" pitchFamily="2" charset="-78"/>
+                <a:ea typeface="Amiri" pitchFamily="2" charset="-78"/>
                 <a:cs typeface="Amiri" pitchFamily="2" charset="-78"/>
               </a:rPr>
               <a:t>جِنْسِيَّتِي أَوْ إِرْثِي الثَّقَافِيُّ</a:t>
@@ -37047,6 +37163,7 @@
                   <a:srgbClr val="1B3B6F"/>
                 </a:solidFill>
                 <a:latin typeface="Amiri" pitchFamily="2" charset="-78"/>
+                <a:ea typeface="Amiri" pitchFamily="2" charset="-78"/>
                 <a:cs typeface="Amiri" pitchFamily="2" charset="-78"/>
               </a:rPr>
               <a:t>عَادَةٌ ثَقَافِيَّةٌ أَعْرِفُهَا</a:t>
@@ -37253,6 +37370,7 @@
                   <a:srgbClr val="1B3B6F"/>
                 </a:solidFill>
                 <a:latin typeface="Amiri" pitchFamily="2" charset="-78"/>
+                <a:ea typeface="Amiri" pitchFamily="2" charset="-78"/>
                 <a:cs typeface="Amiri" pitchFamily="2" charset="-78"/>
               </a:rPr>
               <a:t>مُنَاسَبَةٌ أَحْتَفِلُ بِهَا</a:t>
@@ -37459,6 +37577,7 @@
                   <a:srgbClr val="1B3B6F"/>
                 </a:solidFill>
                 <a:latin typeface="Amiri" pitchFamily="2" charset="-78"/>
+                <a:ea typeface="Amiri" pitchFamily="2" charset="-78"/>
                 <a:cs typeface="Amiri" pitchFamily="2" charset="-78"/>
               </a:rPr>
               <a:t>لُغَةٌ أَتَحَدَّثُهَا</a:t>
@@ -37665,6 +37784,7 @@
                   <a:srgbClr val="1B3B6F"/>
                 </a:solidFill>
                 <a:latin typeface="Amiri" pitchFamily="2" charset="-78"/>
+                <a:ea typeface="Amiri" pitchFamily="2" charset="-78"/>
                 <a:cs typeface="Amiri" pitchFamily="2" charset="-78"/>
               </a:rPr>
               <a:t>طُمُوحٌ ثَقَافِيٌّ لِلْمُسْتَقْبَلِ</a:t>
@@ -37819,6 +37939,7 @@
                   <a:srgbClr val="1B3B6F"/>
                 </a:solidFill>
                 <a:latin typeface="Amiri" pitchFamily="2" charset="-78"/>
+                <a:ea typeface="Amiri" pitchFamily="2" charset="-78"/>
                 <a:cs typeface="Amiri" pitchFamily="2" charset="-78"/>
               </a:rPr>
               <a:t>إِرْثِي ثَقَافِيٌّ مِصْرِيٌّ</a:t>
@@ -37845,6 +37966,7 @@
                   <a:srgbClr val="1B3B6F"/>
                 </a:solidFill>
                 <a:latin typeface="Amiri" pitchFamily="2" charset="-78"/>
+                <a:ea typeface="Amiri" pitchFamily="2" charset="-78"/>
                 <a:cs typeface="Amiri" pitchFamily="2" charset="-78"/>
               </a:rPr>
               <a:t>تُتَبَادَلُ التَّهَانِي فِي العِيدِ</a:t>
@@ -37871,6 +37993,7 @@
                   <a:srgbClr val="1B3B6F"/>
                 </a:solidFill>
                 <a:latin typeface="Amiri" pitchFamily="2" charset="-78"/>
+                <a:ea typeface="Amiri" pitchFamily="2" charset="-78"/>
                 <a:cs typeface="Amiri" pitchFamily="2" charset="-78"/>
               </a:rPr>
               <a:t>نَحْتَفِلُ بِعِيدِ الفِطْرِ</a:t>
@@ -37897,6 +38020,7 @@
                   <a:srgbClr val="1B3B6F"/>
                 </a:solidFill>
                 <a:latin typeface="Amiri" pitchFamily="2" charset="-78"/>
+                <a:ea typeface="Amiri" pitchFamily="2" charset="-78"/>
                 <a:cs typeface="Amiri" pitchFamily="2" charset="-78"/>
               </a:rPr>
               <a:t>أَتَحَدَّثُ الأُرْدِيَّةَ</a:t>
@@ -37923,6 +38047,7 @@
                   <a:srgbClr val="1B3B6F"/>
                 </a:solidFill>
                 <a:latin typeface="Amiri" pitchFamily="2" charset="-78"/>
+                <a:ea typeface="Amiri" pitchFamily="2" charset="-78"/>
                 <a:cs typeface="Amiri" pitchFamily="2" charset="-78"/>
               </a:rPr>
               <a:t>أَطْمَحُ إِلَى أَنْ أُتْقِنَ الفُصْحَى</a:t>
@@ -38056,6 +38181,7 @@
                   <a:srgbClr val="D4AF37"/>
                 </a:solidFill>
                 <a:latin typeface="Amiri" pitchFamily="2" charset="-78"/>
+                <a:ea typeface="Amiri" pitchFamily="2" charset="-78"/>
                 <a:cs typeface="Amiri" pitchFamily="2" charset="-78"/>
               </a:rPr>
               <a:t>م</a:t>
@@ -38376,6 +38502,7 @@
                   <a:srgbClr val="8A6D1E"/>
                 </a:solidFill>
                 <a:latin typeface="Amiri" pitchFamily="2" charset="-78"/>
+                <a:ea typeface="Amiri" pitchFamily="2" charset="-78"/>
                 <a:cs typeface="Amiri" pitchFamily="2" charset="-78"/>
               </a:rPr>
               <a:t>ثَقَافَتِي وَهُوِيَّتِي</a:t>
@@ -39190,6 +39317,7 @@
                   <a:srgbClr val="D4AF37"/>
                 </a:solidFill>
                 <a:latin typeface="Amiri" pitchFamily="2" charset="-78"/>
+                <a:ea typeface="Amiri" pitchFamily="2" charset="-78"/>
                 <a:cs typeface="Amiri" pitchFamily="2" charset="-78"/>
               </a:rPr>
               <a:t>م</a:t>
@@ -39510,6 +39638,7 @@
                   <a:srgbClr val="8A6D1E"/>
                 </a:solidFill>
                 <a:latin typeface="Amiri" pitchFamily="2" charset="-78"/>
+                <a:ea typeface="Amiri" pitchFamily="2" charset="-78"/>
                 <a:cs typeface="Amiri" pitchFamily="2" charset="-78"/>
               </a:rPr>
               <a:t>لِقَاءٌ ثَقَافِيٌّ</a:t>
@@ -39752,6 +39881,7 @@
                   <a:srgbClr val="1B3B6F"/>
                 </a:solidFill>
                 <a:latin typeface="Amiri" pitchFamily="2" charset="-78"/>
+                <a:ea typeface="Amiri" pitchFamily="2" charset="-78"/>
                 <a:cs typeface="Amiri" pitchFamily="2" charset="-78"/>
               </a:rPr>
               <a:t>عَرِّفْ بِنَفْسِكَ وَبِخَلْفِيَّتِكَ الثَّقَافِيَّةِ.</a:t>
@@ -39920,6 +40050,7 @@
                   <a:srgbClr val="1B3B6F"/>
                 </a:solidFill>
                 <a:latin typeface="Amiri" pitchFamily="2" charset="-78"/>
+                <a:ea typeface="Amiri" pitchFamily="2" charset="-78"/>
                 <a:cs typeface="Amiri" pitchFamily="2" charset="-78"/>
               </a:rPr>
               <a:t>صِفْ عَادَةً ثَقَافِيَّةً مِنْ خَلْفِيَّتِكَ.</a:t>
@@ -40088,6 +40219,7 @@
                   <a:srgbClr val="1B3B6F"/>
                 </a:solidFill>
                 <a:latin typeface="Amiri" pitchFamily="2" charset="-78"/>
+                <a:ea typeface="Amiri" pitchFamily="2" charset="-78"/>
                 <a:cs typeface="Amiri" pitchFamily="2" charset="-78"/>
               </a:rPr>
               <a:t>اِسْأَلِ الشَّخْصَ الآخَرَ عَنْ ثَقَافَتِهِ.</a:t>
@@ -40256,6 +40388,7 @@
                   <a:srgbClr val="1B3B6F"/>
                 </a:solidFill>
                 <a:latin typeface="Amiri" pitchFamily="2" charset="-78"/>
+                <a:ea typeface="Amiri" pitchFamily="2" charset="-78"/>
                 <a:cs typeface="Amiri" pitchFamily="2" charset="-78"/>
               </a:rPr>
               <a:t>اُذْكُرْ شَيْئًا تَعَلَّمْتَهُ مِنْ ثَقَافَةٍ أُخْرَى.</a:t>
@@ -40492,6 +40625,7 @@
                   <a:srgbClr val="D4AF37"/>
                 </a:solidFill>
                 <a:latin typeface="Amiri" pitchFamily="2" charset="-78"/>
+                <a:ea typeface="Amiri" pitchFamily="2" charset="-78"/>
                 <a:cs typeface="Amiri" pitchFamily="2" charset="-78"/>
               </a:rPr>
               <a:t>م</a:t>
@@ -40812,6 +40946,7 @@
                   <a:srgbClr val="8A6D1E"/>
                 </a:solidFill>
                 <a:latin typeface="Amiri" pitchFamily="2" charset="-78"/>
+                <a:ea typeface="Amiri" pitchFamily="2" charset="-78"/>
                 <a:cs typeface="Amiri" pitchFamily="2" charset="-78"/>
               </a:rPr>
               <a:t>المُحَادَثَةُ</a:t>
@@ -41054,6 +41189,7 @@
                   <a:srgbClr val="1B3B6F"/>
                 </a:solidFill>
                 <a:latin typeface="Amiri" pitchFamily="2" charset="-78"/>
+                <a:ea typeface="Amiri" pitchFamily="2" charset="-78"/>
                 <a:cs typeface="Amiri" pitchFamily="2" charset="-78"/>
               </a:rPr>
               <a:t>صِفْ بَلَدًا عَرَبِيًّا تُرِيدُ زِيَارَتَهُ وَلِمَاذَا.</a:t>
@@ -41222,6 +41358,7 @@
                   <a:srgbClr val="1B3B6F"/>
                 </a:solidFill>
                 <a:latin typeface="Amiri" pitchFamily="2" charset="-78"/>
+                <a:ea typeface="Amiri" pitchFamily="2" charset="-78"/>
                 <a:cs typeface="Amiri" pitchFamily="2" charset="-78"/>
               </a:rPr>
               <a:t>صِفْ مُنَاسَبَةً ثَقَافِيَّةً أَوْ دِينِيَّةً مَرَرْتَ بِهَا.</a:t>
@@ -41390,6 +41527,7 @@
                   <a:srgbClr val="1B3B6F"/>
                 </a:solidFill>
                 <a:latin typeface="Amiri" pitchFamily="2" charset="-78"/>
+                <a:ea typeface="Amiri" pitchFamily="2" charset="-78"/>
                 <a:cs typeface="Amiri" pitchFamily="2" charset="-78"/>
               </a:rPr>
               <a:t>مَا أَهَمِّيَّةُ اللُّغَةِ العَرَبِيَّةِ فِي حَيَاتِكَ؟</a:t>
@@ -41626,6 +41764,7 @@
                   <a:srgbClr val="D4AF37"/>
                 </a:solidFill>
                 <a:latin typeface="Amiri" pitchFamily="2" charset="-78"/>
+                <a:ea typeface="Amiri" pitchFamily="2" charset="-78"/>
                 <a:cs typeface="Amiri" pitchFamily="2" charset="-78"/>
               </a:rPr>
               <a:t>م</a:t>
@@ -41946,6 +42085,7 @@
                   <a:srgbClr val="8A6D1E"/>
                 </a:solidFill>
                 <a:latin typeface="Amiri" pitchFamily="2" charset="-78"/>
+                <a:ea typeface="Amiri" pitchFamily="2" charset="-78"/>
                 <a:cs typeface="Amiri" pitchFamily="2" charset="-78"/>
               </a:rPr>
               <a:t>مِلَفُّ المَهَارَاتِ</a:t>
@@ -43118,6 +43258,7 @@
                   <a:srgbClr val="D4AF37"/>
                 </a:solidFill>
                 <a:latin typeface="Amiri" pitchFamily="2" charset="-78"/>
+                <a:ea typeface="Amiri" pitchFamily="2" charset="-78"/>
                 <a:cs typeface="Amiri" pitchFamily="2" charset="-78"/>
               </a:rPr>
               <a:t>م</a:t>
@@ -43438,6 +43579,7 @@
                   <a:srgbClr val="8A6D1E"/>
                 </a:solidFill>
                 <a:latin typeface="Amiri" pitchFamily="2" charset="-78"/>
+                <a:ea typeface="Amiri" pitchFamily="2" charset="-78"/>
                 <a:cs typeface="Amiri" pitchFamily="2" charset="-78"/>
               </a:rPr>
               <a:t>قَيِّمْ عَمَلَكَ</a:t>
@@ -43910,6 +44052,7 @@
                   <a:srgbClr val="1F2A37"/>
                 </a:solidFill>
                 <a:latin typeface="Amiri" pitchFamily="2" charset="-78"/>
+                <a:ea typeface="Amiri" pitchFamily="2" charset="-78"/>
                 <a:cs typeface="Amiri" pitchFamily="2" charset="-78"/>
               </a:rPr>
               <a:t>تُزَيَّنُ</a:t>
@@ -43936,6 +44079,7 @@
                   <a:srgbClr val="1F2A37"/>
                 </a:solidFill>
                 <a:latin typeface="Amiri" pitchFamily="2" charset="-78"/>
+                <a:ea typeface="Amiri" pitchFamily="2" charset="-78"/>
                 <a:cs typeface="Amiri" pitchFamily="2" charset="-78"/>
               </a:rPr>
               <a:t>تُتَبَادَلُ</a:t>
@@ -44647,6 +44791,7 @@
                   <a:srgbClr val="D4AF37"/>
                 </a:solidFill>
                 <a:latin typeface="Amiri" pitchFamily="2" charset="-78"/>
+                <a:ea typeface="Amiri" pitchFamily="2" charset="-78"/>
                 <a:cs typeface="Amiri" pitchFamily="2" charset="-78"/>
               </a:rPr>
               <a:t>م</a:t>
@@ -44967,6 +45112,7 @@
                   <a:srgbClr val="8A6D1E"/>
                 </a:solidFill>
                 <a:latin typeface="Amiri" pitchFamily="2" charset="-78"/>
+                <a:ea typeface="Amiri" pitchFamily="2" charset="-78"/>
                 <a:cs typeface="Amiri" pitchFamily="2" charset="-78"/>
               </a:rPr>
               <a:t>التَّحْضِيرُ لِلدَّرْسِ القَادِمِ</a:t>
@@ -45180,6 +45326,7 @@
                   <a:srgbClr val="1B3B6F"/>
                 </a:solidFill>
                 <a:latin typeface="Amiri" pitchFamily="2" charset="-78"/>
+                <a:ea typeface="Amiri" pitchFamily="2" charset="-78"/>
                 <a:cs typeface="Amiri" pitchFamily="2" charset="-78"/>
               </a:rPr>
               <a:t>بُرُوتِينٌ</a:t>
@@ -45269,6 +45416,7 @@
                   <a:srgbClr val="1B3B6F"/>
                 </a:solidFill>
                 <a:latin typeface="Amiri" pitchFamily="2" charset="-78"/>
+                <a:ea typeface="Amiri" pitchFamily="2" charset="-78"/>
                 <a:cs typeface="Amiri" pitchFamily="2" charset="-78"/>
               </a:rPr>
               <a:t>كَرْبُوهِيدْرَاتٌ</a:t>
@@ -45358,6 +45506,7 @@
                   <a:srgbClr val="1B3B6F"/>
                 </a:solidFill>
                 <a:latin typeface="Amiri" pitchFamily="2" charset="-78"/>
+                <a:ea typeface="Amiri" pitchFamily="2" charset="-78"/>
                 <a:cs typeface="Amiri" pitchFamily="2" charset="-78"/>
               </a:rPr>
               <a:t>أَلْيَافٌ</a:t>
@@ -45404,11 +45553,12 @@
               <a:buNone/>
             </a:pPr>
             <a:r>
-              <a:rPr lang="en-US" sz="1000" i="1" dirty="0">
+              <a:rPr lang="ar-SA" sz="1000" i="1" dirty="0">
                 <a:solidFill>
                   <a:srgbClr val="5A6472"/>
                 </a:solidFill>
                 <a:latin typeface="Calibri" pitchFamily="34" charset="0"/>
+                <a:ea typeface="Amiri" pitchFamily="2" charset="-78"/>
                 <a:cs typeface="Amiri" pitchFamily="2" charset="-78"/>
               </a:rPr>
               <a:t>  sing. لِيفٌ</a:t>
@@ -45447,6 +45597,7 @@
                   <a:srgbClr val="1B3B6F"/>
                 </a:solidFill>
                 <a:latin typeface="Amiri" pitchFamily="2" charset="-78"/>
+                <a:ea typeface="Amiri" pitchFamily="2" charset="-78"/>
                 <a:cs typeface="Amiri" pitchFamily="2" charset="-78"/>
               </a:rPr>
               <a:t>فِيتَامِينَاتٌ</a:t>
@@ -45493,11 +45644,12 @@
               <a:buNone/>
             </a:pPr>
             <a:r>
-              <a:rPr lang="en-US" sz="1000" i="1" dirty="0">
+              <a:rPr lang="ar-SA" sz="1000" i="1" dirty="0">
                 <a:solidFill>
                   <a:srgbClr val="5A6472"/>
                 </a:solidFill>
                 <a:latin typeface="Calibri" pitchFamily="34" charset="0"/>
+                <a:ea typeface="Amiri" pitchFamily="2" charset="-78"/>
                 <a:cs typeface="Amiri" pitchFamily="2" charset="-78"/>
               </a:rPr>
               <a:t>  sing. فِيتَامِينٌ</a:t>
@@ -45536,6 +45688,7 @@
                   <a:srgbClr val="1B3B6F"/>
                 </a:solidFill>
                 <a:latin typeface="Amiri" pitchFamily="2" charset="-78"/>
+                <a:ea typeface="Amiri" pitchFamily="2" charset="-78"/>
                 <a:cs typeface="Amiri" pitchFamily="2" charset="-78"/>
               </a:rPr>
               <a:t>مَصْدَرُ طَاقَةٍ</a:t>
@@ -45582,11 +45735,12 @@
               <a:buNone/>
             </a:pPr>
             <a:r>
-              <a:rPr lang="en-US" sz="1000" i="1" dirty="0">
+              <a:rPr lang="ar-SA" sz="1000" i="1" dirty="0">
                 <a:solidFill>
                   <a:srgbClr val="5A6472"/>
                 </a:solidFill>
                 <a:latin typeface="Calibri" pitchFamily="34" charset="0"/>
+                <a:ea typeface="Amiri" pitchFamily="2" charset="-78"/>
                 <a:cs typeface="Amiri" pitchFamily="2" charset="-78"/>
               </a:rPr>
               <a:t>  pl. مَصَادِرُ طَاقَةٍ</a:t>
@@ -45701,6 +45855,7 @@
                   <a:srgbClr val="1B3B6F"/>
                 </a:solidFill>
                 <a:latin typeface="Amiri" pitchFamily="2" charset="-78"/>
+                <a:ea typeface="Amiri" pitchFamily="2" charset="-78"/>
                 <a:cs typeface="Amiri" pitchFamily="2" charset="-78"/>
               </a:rPr>
               <a:t>وَجْبَتِي المُفَضَّلَةُ … وَفِيهَا …</a:t>
@@ -46370,6 +46525,7 @@
                   <a:srgbClr val="FFFFFF"/>
                 </a:solidFill>
                 <a:latin typeface="Amiri" pitchFamily="2" charset="-78"/>
+                <a:ea typeface="Amiri" pitchFamily="2" charset="-78"/>
                 <a:cs typeface="Amiri" pitchFamily="2" charset="-78"/>
               </a:rPr>
               <a:t>أَحْسَنْتُمْ! إِلَى اللِّقَاءِ</a:t>
@@ -46522,6 +46678,7 @@
                   <a:srgbClr val="D4AF37"/>
                 </a:solidFill>
                 <a:latin typeface="Amiri" pitchFamily="2" charset="-78"/>
+                <a:ea typeface="Amiri" pitchFamily="2" charset="-78"/>
                 <a:cs typeface="Amiri" pitchFamily="2" charset="-78"/>
               </a:rPr>
               <a:t>الغِذَاءُ وَالتَّغْذِيَةُ</a:t>
@@ -46573,6 +46730,7 @@
                   <a:srgbClr val="FFFFFF"/>
                 </a:solidFill>
                 <a:latin typeface="Amiri" pitchFamily="2" charset="-78"/>
+                <a:ea typeface="Amiri" pitchFamily="2" charset="-78"/>
                 <a:cs typeface="Amiri" pitchFamily="2" charset="-78"/>
               </a:rPr>
               <a:t>أَنَّ</a:t>
@@ -46681,6 +46839,7 @@
                   <a:srgbClr val="D4AF37"/>
                 </a:solidFill>
                 <a:latin typeface="Amiri" pitchFamily="2" charset="-78"/>
+                <a:ea typeface="Amiri" pitchFamily="2" charset="-78"/>
                 <a:cs typeface="Amiri" pitchFamily="2" charset="-78"/>
               </a:rPr>
               <a:t>م</a:t>
@@ -47001,6 +47160,7 @@
                   <a:srgbClr val="8A6D1E"/>
                 </a:solidFill>
                 <a:latin typeface="Amiri" pitchFamily="2" charset="-78"/>
+                <a:ea typeface="Amiri" pitchFamily="2" charset="-78"/>
                 <a:cs typeface="Amiri" pitchFamily="2" charset="-78"/>
               </a:rPr>
               <a:t>خَرِيطَةُ الدَّرْسِ</a:t>
@@ -47315,6 +47475,7 @@
                   <a:srgbClr val="0E7C86"/>
                 </a:solidFill>
                 <a:latin typeface="Amiri" pitchFamily="2" charset="-78"/>
+                <a:ea typeface="Amiri" pitchFamily="2" charset="-78"/>
                 <a:cs typeface="Amiri" pitchFamily="2" charset="-78"/>
               </a:rPr>
               <a:t>تَهْيِئَةٌ</a:t>
@@ -47591,6 +47752,7 @@
                   <a:srgbClr val="1B3B6F"/>
                 </a:solidFill>
                 <a:latin typeface="Amiri" pitchFamily="2" charset="-78"/>
+                <a:ea typeface="Amiri" pitchFamily="2" charset="-78"/>
                 <a:cs typeface="Amiri" pitchFamily="2" charset="-78"/>
               </a:rPr>
               <a:t>خُطَّةُ التَّقْيِيمِ</a:t>
@@ -47867,6 +48029,7 @@
                   <a:srgbClr val="6B4C9A"/>
                 </a:solidFill>
                 <a:latin typeface="Amiri" pitchFamily="2" charset="-78"/>
+                <a:ea typeface="Amiri" pitchFamily="2" charset="-78"/>
                 <a:cs typeface="Amiri" pitchFamily="2" charset="-78"/>
               </a:rPr>
               <a:t>الاِسْتِمَاعُ</a:t>
@@ -48143,6 +48306,7 @@
                   <a:srgbClr val="2F6FB0"/>
                 </a:solidFill>
                 <a:latin typeface="Amiri" pitchFamily="2" charset="-78"/>
+                <a:ea typeface="Amiri" pitchFamily="2" charset="-78"/>
                 <a:cs typeface="Amiri" pitchFamily="2" charset="-78"/>
               </a:rPr>
               <a:t>القِرَاءَةُ</a:t>
@@ -48419,6 +48583,7 @@
                   <a:srgbClr val="1E6B52"/>
                 </a:solidFill>
                 <a:latin typeface="Amiri" pitchFamily="2" charset="-78"/>
+                <a:ea typeface="Amiri" pitchFamily="2" charset="-78"/>
                 <a:cs typeface="Amiri" pitchFamily="2" charset="-78"/>
               </a:rPr>
               <a:t>الكِتَابَةُ وَالتَّحَدُّثُ</a:t>
@@ -48695,6 +48860,7 @@
                   <a:srgbClr val="8A6D1E"/>
                 </a:solidFill>
                 <a:latin typeface="Amiri" pitchFamily="2" charset="-78"/>
+                <a:ea typeface="Amiri" pitchFamily="2" charset="-78"/>
                 <a:cs typeface="Amiri" pitchFamily="2" charset="-78"/>
               </a:rPr>
               <a:t>الهَدَفُ</a:t>
@@ -48971,6 +49137,7 @@
                   <a:srgbClr val="C45A3C"/>
                 </a:solidFill>
                 <a:latin typeface="Amiri" pitchFamily="2" charset="-78"/>
+                <a:ea typeface="Amiri" pitchFamily="2" charset="-78"/>
                 <a:cs typeface="Amiri" pitchFamily="2" charset="-78"/>
               </a:rPr>
               <a:t>اِسْتَعِدَّ</a:t>
@@ -49214,6 +49381,7 @@
                   <a:srgbClr val="D4AF37"/>
                 </a:solidFill>
                 <a:latin typeface="Amiri" pitchFamily="2" charset="-78"/>
+                <a:ea typeface="Amiri" pitchFamily="2" charset="-78"/>
                 <a:cs typeface="Amiri" pitchFamily="2" charset="-78"/>
               </a:rPr>
               <a:t>م</a:t>
@@ -49534,6 +49702,7 @@
                   <a:srgbClr val="8A6D1E"/>
                 </a:solidFill>
                 <a:latin typeface="Amiri" pitchFamily="2" charset="-78"/>
+                <a:ea typeface="Amiri" pitchFamily="2" charset="-78"/>
                 <a:cs typeface="Amiri" pitchFamily="2" charset="-78"/>
               </a:rPr>
               <a:t>اِبْدَأِ الآنَ</a:t>
@@ -49720,6 +49889,7 @@
                   <a:srgbClr val="1B3B6F"/>
                 </a:solidFill>
                 <a:latin typeface="Amiri" pitchFamily="2" charset="-78"/>
+                <a:ea typeface="Amiri" pitchFamily="2" charset="-78"/>
                 <a:cs typeface="Amiri" pitchFamily="2" charset="-78"/>
               </a:rPr>
               <a:t>فَهْمُ المَسْمُوعِ</a:t>
@@ -50184,6 +50354,7 @@
                   <a:srgbClr val="1B3B6F"/>
                 </a:solidFill>
                 <a:latin typeface="Amiri" pitchFamily="2" charset="-78"/>
+                <a:ea typeface="Amiri" pitchFamily="2" charset="-78"/>
                 <a:cs typeface="Amiri" pitchFamily="2" charset="-78"/>
               </a:rPr>
               <a:t>زَارَ</a:t>
@@ -50298,6 +50469,7 @@
                   <a:srgbClr val="1F2A37"/>
                 </a:solidFill>
                 <a:latin typeface="Amiri" pitchFamily="2" charset="-78"/>
+                <a:ea typeface="Amiri" pitchFamily="2" charset="-78"/>
                 <a:cs typeface="Amiri" pitchFamily="2" charset="-78"/>
               </a:rPr>
               <a:t>زُرْنَا</a:t>
@@ -50399,6 +50571,7 @@
                   <a:srgbClr val="1F2A37"/>
                 </a:solidFill>
                 <a:latin typeface="Amiri" pitchFamily="2" charset="-78"/>
+                <a:ea typeface="Amiri" pitchFamily="2" charset="-78"/>
                 <a:cs typeface="Amiri" pitchFamily="2" charset="-78"/>
               </a:rPr>
               <a:t>زَارْنَا</a:t>
@@ -50500,6 +50673,7 @@
                   <a:srgbClr val="1F2A37"/>
                 </a:solidFill>
                 <a:latin typeface="Amiri" pitchFamily="2" charset="-78"/>
+                <a:ea typeface="Amiri" pitchFamily="2" charset="-78"/>
                 <a:cs typeface="Amiri" pitchFamily="2" charset="-78"/>
               </a:rPr>
               <a:t>زَارُوا</a:t>
@@ -50648,6 +50822,7 @@
                   <a:srgbClr val="1B3B6F"/>
                 </a:solidFill>
                 <a:latin typeface="Amiri" pitchFamily="2" charset="-78"/>
+                <a:ea typeface="Amiri" pitchFamily="2" charset="-78"/>
                 <a:cs typeface="Amiri" pitchFamily="2" charset="-78"/>
               </a:rPr>
               <a:t>نَتَخَلَّى عَنْ لُغَتِنَا</a:t>
@@ -50762,6 +50937,7 @@
                   <a:srgbClr val="1F2A37"/>
                 </a:solidFill>
                 <a:latin typeface="Amiri" pitchFamily="2" charset="-78"/>
+                <a:ea typeface="Amiri" pitchFamily="2" charset="-78"/>
                 <a:cs typeface="Amiri" pitchFamily="2" charset="-78"/>
               </a:rPr>
               <a:t>لَمْ</a:t>
@@ -50863,6 +51039,7 @@
                   <a:srgbClr val="1F2A37"/>
                 </a:solidFill>
                 <a:latin typeface="Amiri" pitchFamily="2" charset="-78"/>
+                <a:ea typeface="Amiri" pitchFamily="2" charset="-78"/>
                 <a:cs typeface="Amiri" pitchFamily="2" charset="-78"/>
               </a:rPr>
               <a:t>سَـ</a:t>
@@ -50964,6 +51141,7 @@
                   <a:srgbClr val="1F2A37"/>
                 </a:solidFill>
                 <a:latin typeface="Amiri" pitchFamily="2" charset="-78"/>
+                <a:ea typeface="Amiri" pitchFamily="2" charset="-78"/>
                 <a:cs typeface="Amiri" pitchFamily="2" charset="-78"/>
               </a:rPr>
               <a:t>لَنْ</a:t>
@@ -51112,6 +51290,7 @@
                   <a:srgbClr val="1B3B6F"/>
                 </a:solidFill>
                 <a:latin typeface="Amiri" pitchFamily="2" charset="-78"/>
+                <a:ea typeface="Amiri" pitchFamily="2" charset="-78"/>
                 <a:cs typeface="Amiri" pitchFamily="2" charset="-78"/>
               </a:rPr>
               <a:t>يَتَكَيَّفُ</a:t>
@@ -51138,6 +51317,7 @@
                   <a:srgbClr val="1B3B6F"/>
                 </a:solidFill>
                 <a:latin typeface="Amiri" pitchFamily="2" charset="-78"/>
+                <a:ea typeface="Amiri" pitchFamily="2" charset="-78"/>
                 <a:cs typeface="Amiri" pitchFamily="2" charset="-78"/>
               </a:rPr>
               <a:t>الحَيَاةِ الجَدِيدَةِ</a:t>
@@ -51252,6 +51432,7 @@
                   <a:srgbClr val="1F2A37"/>
                 </a:solidFill>
                 <a:latin typeface="Amiri" pitchFamily="2" charset="-78"/>
+                <a:ea typeface="Amiri" pitchFamily="2" charset="-78"/>
                 <a:cs typeface="Amiri" pitchFamily="2" charset="-78"/>
               </a:rPr>
               <a:t>عَلَى</a:t>
@@ -51353,6 +51534,7 @@
                   <a:srgbClr val="1F2A37"/>
                 </a:solidFill>
                 <a:latin typeface="Amiri" pitchFamily="2" charset="-78"/>
+                <a:ea typeface="Amiri" pitchFamily="2" charset="-78"/>
                 <a:cs typeface="Amiri" pitchFamily="2" charset="-78"/>
               </a:rPr>
               <a:t>إِلَى</a:t>
@@ -51454,6 +51636,7 @@
                   <a:srgbClr val="1F2A37"/>
                 </a:solidFill>
                 <a:latin typeface="Amiri" pitchFamily="2" charset="-78"/>
+                <a:ea typeface="Amiri" pitchFamily="2" charset="-78"/>
                 <a:cs typeface="Amiri" pitchFamily="2" charset="-78"/>
               </a:rPr>
               <a:t>مَعَ</a:t>
@@ -51690,6 +51873,7 @@
                   <a:srgbClr val="1F2A37"/>
                 </a:solidFill>
                 <a:latin typeface="Amiri" pitchFamily="2" charset="-78"/>
+                <a:ea typeface="Amiri" pitchFamily="2" charset="-78"/>
                 <a:cs typeface="Amiri" pitchFamily="2" charset="-78"/>
               </a:rPr>
               <a:t>المَدِينَةُ الَّتِي زُرْتُهَا جَمِيلَةٌ.</a:t>
@@ -51791,6 +51975,7 @@
                   <a:srgbClr val="1F2A37"/>
                 </a:solidFill>
                 <a:latin typeface="Amiri" pitchFamily="2" charset="-78"/>
+                <a:ea typeface="Amiri" pitchFamily="2" charset="-78"/>
                 <a:cs typeface="Amiri" pitchFamily="2" charset="-78"/>
               </a:rPr>
               <a:t>المَدِينَةُ الَّذِي زُرْتُهَا جَمِيلَةٌ.</a:t>
@@ -51892,6 +52077,7 @@
                   <a:srgbClr val="1F2A37"/>
                 </a:solidFill>
                 <a:latin typeface="Amiri" pitchFamily="2" charset="-78"/>
+                <a:ea typeface="Amiri" pitchFamily="2" charset="-78"/>
                 <a:cs typeface="Amiri" pitchFamily="2" charset="-78"/>
               </a:rPr>
               <a:t>المَدِينَةُ الَّذِينَ زُرْتُهَا جَمِيلَةٌ.</a:t>
@@ -52227,6 +52413,7 @@
                   <a:srgbClr val="D4AF37"/>
                 </a:solidFill>
                 <a:latin typeface="Amiri" pitchFamily="2" charset="-78"/>
+                <a:ea typeface="Amiri" pitchFamily="2" charset="-78"/>
                 <a:cs typeface="Amiri" pitchFamily="2" charset="-78"/>
               </a:rPr>
               <a:t>م</a:t>
@@ -52547,6 +52734,7 @@
                   <a:srgbClr val="8A6D1E"/>
                 </a:solidFill>
                 <a:latin typeface="Amiri" pitchFamily="2" charset="-78"/>
+                <a:ea typeface="Amiri" pitchFamily="2" charset="-78"/>
                 <a:cs typeface="Amiri" pitchFamily="2" charset="-78"/>
               </a:rPr>
               <a:t>الإِجَابَاتُ وَالتَّعْلِيلُ</a:t>
@@ -52733,6 +52921,7 @@
                   <a:srgbClr val="1B3B6F"/>
                 </a:solidFill>
                 <a:latin typeface="Amiri" pitchFamily="2" charset="-78"/>
+                <a:ea typeface="Amiri" pitchFamily="2" charset="-78"/>
                 <a:cs typeface="Amiri" pitchFamily="2" charset="-78"/>
               </a:rPr>
               <a:t>فَهْمُ المَسْمُوعِ</a:t>
@@ -53262,6 +53451,7 @@
                   <a:srgbClr val="1B3B6F"/>
                 </a:solidFill>
                 <a:latin typeface="Amiri" pitchFamily="2" charset="-78"/>
+                <a:ea typeface="Amiri" pitchFamily="2" charset="-78"/>
                 <a:cs typeface="Amiri" pitchFamily="2" charset="-78"/>
               </a:rPr>
               <a:t>زَارَ</a:t>
@@ -53403,6 +53593,7 @@
                   <a:srgbClr val="1F2A37"/>
                 </a:solidFill>
                 <a:latin typeface="Amiri" pitchFamily="2" charset="-78"/>
+                <a:ea typeface="Amiri" pitchFamily="2" charset="-78"/>
                 <a:cs typeface="Amiri" pitchFamily="2" charset="-78"/>
               </a:rPr>
               <a:t>زُرْنَا</a:t>
@@ -53504,6 +53695,7 @@
                   <a:srgbClr val="9AA1AB"/>
                 </a:solidFill>
                 <a:latin typeface="Amiri" pitchFamily="2" charset="-78"/>
+                <a:ea typeface="Amiri" pitchFamily="2" charset="-78"/>
                 <a:cs typeface="Amiri" pitchFamily="2" charset="-78"/>
               </a:rPr>
               <a:t>زَارْنَا</a:t>
@@ -53605,6 +53797,7 @@
                   <a:srgbClr val="9AA1AB"/>
                 </a:solidFill>
                 <a:latin typeface="Amiri" pitchFamily="2" charset="-78"/>
+                <a:ea typeface="Amiri" pitchFamily="2" charset="-78"/>
                 <a:cs typeface="Amiri" pitchFamily="2" charset="-78"/>
               </a:rPr>
               <a:t>زَارُوا</a:t>
@@ -53791,6 +53984,7 @@
                   <a:srgbClr val="1B3B6F"/>
                 </a:solidFill>
                 <a:latin typeface="Amiri" pitchFamily="2" charset="-78"/>
+                <a:ea typeface="Amiri" pitchFamily="2" charset="-78"/>
                 <a:cs typeface="Amiri" pitchFamily="2" charset="-78"/>
               </a:rPr>
               <a:t>نَتَخَلَّى عَنْ لُغَتِنَا</a:t>
@@ -53905,6 +54099,7 @@
                   <a:srgbClr val="9AA1AB"/>
                 </a:solidFill>
                 <a:latin typeface="Amiri" pitchFamily="2" charset="-78"/>
+                <a:ea typeface="Amiri" pitchFamily="2" charset="-78"/>
                 <a:cs typeface="Amiri" pitchFamily="2" charset="-78"/>
               </a:rPr>
               <a:t>لَمْ</a:t>
@@ -54006,6 +54201,7 @@
                   <a:srgbClr val="9AA1AB"/>
                 </a:solidFill>
                 <a:latin typeface="Amiri" pitchFamily="2" charset="-78"/>
+                <a:ea typeface="Amiri" pitchFamily="2" charset="-78"/>
                 <a:cs typeface="Amiri" pitchFamily="2" charset="-78"/>
               </a:rPr>
               <a:t>سَـ</a:t>
@@ -54134,6 +54330,7 @@
                   <a:srgbClr val="1F2A37"/>
                 </a:solidFill>
                 <a:latin typeface="Amiri" pitchFamily="2" charset="-78"/>
+                <a:ea typeface="Amiri" pitchFamily="2" charset="-78"/>
                 <a:cs typeface="Amiri" pitchFamily="2" charset="-78"/>
               </a:rPr>
               <a:t>لَنْ</a:t>
@@ -54320,6 +54517,7 @@
                   <a:srgbClr val="1B3B6F"/>
                 </a:solidFill>
                 <a:latin typeface="Amiri" pitchFamily="2" charset="-78"/>
+                <a:ea typeface="Amiri" pitchFamily="2" charset="-78"/>
                 <a:cs typeface="Amiri" pitchFamily="2" charset="-78"/>
               </a:rPr>
               <a:t>يَتَكَيَّفُ</a:t>
@@ -54346,6 +54544,7 @@
                   <a:srgbClr val="1B3B6F"/>
                 </a:solidFill>
                 <a:latin typeface="Amiri" pitchFamily="2" charset="-78"/>
+                <a:ea typeface="Amiri" pitchFamily="2" charset="-78"/>
                 <a:cs typeface="Amiri" pitchFamily="2" charset="-78"/>
               </a:rPr>
               <a:t>الحَيَاةِ الجَدِيدَةِ</a:t>
@@ -54460,6 +54659,7 @@
                   <a:srgbClr val="9AA1AB"/>
                 </a:solidFill>
                 <a:latin typeface="Amiri" pitchFamily="2" charset="-78"/>
+                <a:ea typeface="Amiri" pitchFamily="2" charset="-78"/>
                 <a:cs typeface="Amiri" pitchFamily="2" charset="-78"/>
               </a:rPr>
               <a:t>عَلَى</a:t>
@@ -54561,6 +54761,7 @@
                   <a:srgbClr val="9AA1AB"/>
                 </a:solidFill>
                 <a:latin typeface="Amiri" pitchFamily="2" charset="-78"/>
+                <a:ea typeface="Amiri" pitchFamily="2" charset="-78"/>
                 <a:cs typeface="Amiri" pitchFamily="2" charset="-78"/>
               </a:rPr>
               <a:t>إِلَى</a:t>
@@ -54689,6 +54890,7 @@
                   <a:srgbClr val="1F2A37"/>
                 </a:solidFill>
                 <a:latin typeface="Amiri" pitchFamily="2" charset="-78"/>
+                <a:ea typeface="Amiri" pitchFamily="2" charset="-78"/>
                 <a:cs typeface="Amiri" pitchFamily="2" charset="-78"/>
               </a:rPr>
               <a:t>مَعَ</a:t>
@@ -54990,6 +55192,7 @@
                   <a:srgbClr val="1F2A37"/>
                 </a:solidFill>
                 <a:latin typeface="Amiri" pitchFamily="2" charset="-78"/>
+                <a:ea typeface="Amiri" pitchFamily="2" charset="-78"/>
                 <a:cs typeface="Amiri" pitchFamily="2" charset="-78"/>
               </a:rPr>
               <a:t>المَدِينَةُ الَّتِي زُرْتُهَا جَمِيلَةٌ.</a:t>
@@ -55091,6 +55294,7 @@
                   <a:srgbClr val="9AA1AB"/>
                 </a:solidFill>
                 <a:latin typeface="Amiri" pitchFamily="2" charset="-78"/>
+                <a:ea typeface="Amiri" pitchFamily="2" charset="-78"/>
                 <a:cs typeface="Amiri" pitchFamily="2" charset="-78"/>
               </a:rPr>
               <a:t>المَدِينَةُ الَّذِي زُرْتُهَا جَمِيلَةٌ.</a:t>
@@ -55192,6 +55396,7 @@
                   <a:srgbClr val="9AA1AB"/>
                 </a:solidFill>
                 <a:latin typeface="Amiri" pitchFamily="2" charset="-78"/>
+                <a:ea typeface="Amiri" pitchFamily="2" charset="-78"/>
                 <a:cs typeface="Amiri" pitchFamily="2" charset="-78"/>
               </a:rPr>
               <a:t>المَدِينَةُ الَّذِينَ زُرْتُهَا جَمِيلَةٌ.</a:t>
@@ -55381,6 +55586,7 @@
                   <a:srgbClr val="1B3B6F"/>
                 </a:solidFill>
                 <a:latin typeface="Amiri" pitchFamily="2" charset="-78"/>
+                <a:ea typeface="Amiri" pitchFamily="2" charset="-78"/>
                 <a:cs typeface="Amiri" pitchFamily="2" charset="-78"/>
               </a:rPr>
               <a:t>الزَّمَنُ · حَرْفُ الجَرِّ · المَجْهُولُ · أَنَّ · التَّحَفُّظُ</a:t>
@@ -55514,6 +55720,7 @@
                   <a:srgbClr val="D4AF37"/>
                 </a:solidFill>
                 <a:latin typeface="Amiri" pitchFamily="2" charset="-78"/>
+                <a:ea typeface="Amiri" pitchFamily="2" charset="-78"/>
                 <a:cs typeface="Amiri" pitchFamily="2" charset="-78"/>
               </a:rPr>
               <a:t>م</a:t>
@@ -55834,6 +56041,7 @@
                   <a:srgbClr val="8A6D1E"/>
                 </a:solidFill>
                 <a:latin typeface="Amiri" pitchFamily="2" charset="-78"/>
+                <a:ea typeface="Amiri" pitchFamily="2" charset="-78"/>
                 <a:cs typeface="Amiri" pitchFamily="2" charset="-78"/>
               </a:rPr>
               <a:t>مُرَاجَعَةُ القَوَاعِدِ</a:t>
@@ -56114,6 +56322,7 @@
                   <a:srgbClr val="1B3B6F"/>
                 </a:solidFill>
                 <a:latin typeface="Amiri" pitchFamily="2" charset="-78"/>
+                <a:ea typeface="Amiri" pitchFamily="2" charset="-78"/>
                 <a:cs typeface="Amiri" pitchFamily="2" charset="-78"/>
               </a:rPr>
               <a:t>زُرْنَا · كَانَتْ تُعِدُّ · سَنُنَظِّمُ · لَنْ نَتَخَلَّى</a:t>
@@ -56320,6 +56529,7 @@
                   <a:srgbClr val="1B3B6F"/>
                 </a:solidFill>
                 <a:latin typeface="Amiri" pitchFamily="2" charset="-78"/>
+                <a:ea typeface="Amiri" pitchFamily="2" charset="-78"/>
                 <a:cs typeface="Amiri" pitchFamily="2" charset="-78"/>
               </a:rPr>
               <a:t>نَحْتَفِلُ بِالعِيدِ · أَنْتَمِي إِلَى · يَتَكَيَّفُ مَعَ</a:t>
@@ -56526,6 +56736,7 @@
                   <a:srgbClr val="1B3B6F"/>
                 </a:solidFill>
                 <a:latin typeface="Amiri" pitchFamily="2" charset="-78"/>
+                <a:ea typeface="Amiri" pitchFamily="2" charset="-78"/>
                 <a:cs typeface="Amiri" pitchFamily="2" charset="-78"/>
               </a:rPr>
               <a:t>تُزَيَّنُ القَاعَةُ بِالأَضْوَاءِ</a:t>
@@ -56667,6 +56878,7 @@
                   <a:srgbClr val="1B3B6F"/>
                 </a:solidFill>
                 <a:latin typeface="Amiri" pitchFamily="2" charset="-78"/>
+                <a:ea typeface="Amiri" pitchFamily="2" charset="-78"/>
                 <a:cs typeface="Amiri" pitchFamily="2" charset="-78"/>
               </a:rPr>
               <a:t>المَدِينَةُ الَّتِي زُرْتُهَا · أَكْبَرُ مِنَ السَّابِقِ</a:t>
@@ -56808,6 +57020,7 @@
                   <a:srgbClr val="1B3B6F"/>
                 </a:solidFill>
                 <a:latin typeface="Amiri" pitchFamily="2" charset="-78"/>
+                <a:ea typeface="Amiri" pitchFamily="2" charset="-78"/>
                 <a:cs typeface="Amiri" pitchFamily="2" charset="-78"/>
               </a:rPr>
               <a:t>إِلَى لُبْنَانَ · أَنَّ التَّنَوُّعَ ثَرْوَةٌ</a:t>
@@ -56962,6 +57175,7 @@
                   <a:srgbClr val="1B3B6F"/>
                 </a:solidFill>
                 <a:latin typeface="Amiri" pitchFamily="2" charset="-78"/>
+                <a:ea typeface="Amiri" pitchFamily="2" charset="-78"/>
                 <a:cs typeface="Amiri" pitchFamily="2" charset="-78"/>
               </a:rPr>
               <a:t>فِي بَعْضِ</a:t>
@@ -56988,6 +57202,7 @@
                   <a:srgbClr val="1B3B6F"/>
                 </a:solidFill>
                 <a:latin typeface="Amiri" pitchFamily="2" charset="-78"/>
+                <a:ea typeface="Amiri" pitchFamily="2" charset="-78"/>
                 <a:cs typeface="Amiri" pitchFamily="2" charset="-78"/>
               </a:rPr>
               <a:t>عَلَى حَدِّ عِلْمِي</a:t>
@@ -57134,6 +57349,7 @@
                   <a:srgbClr val="D4AF37"/>
                 </a:solidFill>
                 <a:latin typeface="Amiri" pitchFamily="2" charset="-78"/>
+                <a:ea typeface="Amiri" pitchFamily="2" charset="-78"/>
                 <a:cs typeface="Amiri" pitchFamily="2" charset="-78"/>
               </a:rPr>
               <a:t>م</a:t>
@@ -57454,6 +57670,7 @@
                   <a:srgbClr val="8A6D1E"/>
                 </a:solidFill>
                 <a:latin typeface="Amiri" pitchFamily="2" charset="-78"/>
+                <a:ea typeface="Amiri" pitchFamily="2" charset="-78"/>
                 <a:cs typeface="Amiri" pitchFamily="2" charset="-78"/>
               </a:rPr>
               <a:t>خُطَّةُ التَّقْيِيمِ</a:t>
@@ -58588,6 +58805,7 @@
                   <a:srgbClr val="D4AF37"/>
                 </a:solidFill>
                 <a:latin typeface="Amiri" pitchFamily="2" charset="-78"/>
+                <a:ea typeface="Amiri" pitchFamily="2" charset="-78"/>
                 <a:cs typeface="Amiri" pitchFamily="2" charset="-78"/>
               </a:rPr>
               <a:t>م</a:t>
@@ -58908,6 +59126,7 @@
                   <a:srgbClr val="8A6D1E"/>
                 </a:solidFill>
                 <a:latin typeface="Amiri" pitchFamily="2" charset="-78"/>
+                <a:ea typeface="Amiri" pitchFamily="2" charset="-78"/>
                 <a:cs typeface="Amiri" pitchFamily="2" charset="-78"/>
               </a:rPr>
               <a:t>الاِسْتِمَاعُ</a:t>
@@ -60831,6 +61050,7 @@
                   <a:srgbClr val="D4AF37"/>
                 </a:solidFill>
                 <a:latin typeface="Amiri" pitchFamily="2" charset="-78"/>
+                <a:ea typeface="Amiri" pitchFamily="2" charset="-78"/>
                 <a:cs typeface="Amiri" pitchFamily="2" charset="-78"/>
               </a:rPr>
               <a:t>م</a:t>
@@ -61151,6 +61371,7 @@
                   <a:srgbClr val="8A6D1E"/>
                 </a:solidFill>
                 <a:latin typeface="Amiri" pitchFamily="2" charset="-78"/>
+                <a:ea typeface="Amiri" pitchFamily="2" charset="-78"/>
                 <a:cs typeface="Amiri" pitchFamily="2" charset="-78"/>
               </a:rPr>
               <a:t>الإِجَابَاتُ</a:t>
@@ -61692,6 +61913,7 @@
                   <a:srgbClr val="8A6D1E"/>
                 </a:solidFill>
                 <a:latin typeface="Amiri" pitchFamily="2" charset="-78"/>
+                <a:ea typeface="Amiri" pitchFamily="2" charset="-78"/>
                 <a:cs typeface="Amiri" pitchFamily="2" charset="-78"/>
               </a:rPr>
               <a:t>كُنَّا نَحْتَفِلُ بِالعِيدِ فِي بَلَدِ أُسْرَتِي.</a:t>
@@ -62195,6 +62417,7 @@
                   <a:srgbClr val="8A6D1E"/>
                 </a:solidFill>
                 <a:latin typeface="Amiri" pitchFamily="2" charset="-78"/>
+                <a:ea typeface="Amiri" pitchFamily="2" charset="-78"/>
                 <a:cs typeface="Amiri" pitchFamily="2" charset="-78"/>
               </a:rPr>
               <a:t>وَكَانَتْ جَدَّتِي تُعِدُّ الحَلْوَى بِنَفْسِهَا</a:t>
@@ -62221,6 +62444,7 @@
                   <a:srgbClr val="8A6D1E"/>
                 </a:solidFill>
                 <a:latin typeface="Amiri" pitchFamily="2" charset="-78"/>
+                <a:ea typeface="Amiri" pitchFamily="2" charset="-78"/>
                 <a:cs typeface="Amiri" pitchFamily="2" charset="-78"/>
               </a:rPr>
               <a:t>كَانَ</a:t>
@@ -62737,6 +62961,7 @@
                   <a:srgbClr val="8A6D1E"/>
                 </a:solidFill>
                 <a:latin typeface="Amiri" pitchFamily="2" charset="-78"/>
+                <a:ea typeface="Amiri" pitchFamily="2" charset="-78"/>
                 <a:cs typeface="Amiri" pitchFamily="2" charset="-78"/>
               </a:rPr>
               <a:t>وَفِي العَامِ المَاضِي زُرْنَا الأَقَارِبَ هُنَاكَ بَعْدَ غِيَابٍ طَوِيلٍ.</a:t>
@@ -63240,6 +63465,7 @@
                   <a:srgbClr val="8A6D1E"/>
                 </a:solidFill>
                 <a:latin typeface="Amiri" pitchFamily="2" charset="-78"/>
+                <a:ea typeface="Amiri" pitchFamily="2" charset="-78"/>
                 <a:cs typeface="Amiri" pitchFamily="2" charset="-78"/>
               </a:rPr>
               <a:t>أَمَّا الآنَ فَنَحْتَفِلُ عَادَةً فِي المَرْكَزِ الثَّقَافِيِّ.</a:t>
@@ -63338,13 +63564,9 @@
     <a:fontScheme name="Office">
       <a:majorFont>
         <a:latin typeface="Calibri Light" panose="020F0302020204030204"/>
-        <a:ea typeface=""/>
-        <a:cs typeface=""/>
-        <a:font script="Jpan" typeface="游ゴシック Light"/>
-        <a:font script="Hang" typeface="맑은 고딕"/>
-        <a:font script="Hans" typeface="等线 Light"/>
-        <a:font script="Hant" typeface="新細明體"/>
-        <a:font script="Arab" typeface="Times New Roman"/>
+        <a:ea typeface="Amiri" pitchFamily="2" charset="-78"/>
+        <a:cs typeface="Amiri" pitchFamily="2" charset="-78"/>
+        <a:font script="Arab" typeface="Amiri"/>
         <a:font script="Hebr" typeface="Times New Roman"/>
         <a:font script="Thai" typeface="Angsana New"/>
         <a:font script="Ethi" typeface="Nyala"/>
@@ -63390,13 +63612,9 @@
       </a:majorFont>
       <a:minorFont>
         <a:latin typeface="Calibri" panose="020F0502020204030204"/>
-        <a:ea typeface=""/>
-        <a:cs typeface=""/>
-        <a:font script="Jpan" typeface="游ゴシック"/>
-        <a:font script="Hang" typeface="맑은 고딕"/>
-        <a:font script="Hans" typeface="等线"/>
-        <a:font script="Hant" typeface="新細明體"/>
-        <a:font script="Arab" typeface="Arial"/>
+        <a:ea typeface="Amiri" pitchFamily="2" charset="-78"/>
+        <a:cs typeface="Amiri" pitchFamily="2" charset="-78"/>
+        <a:font script="Arab" typeface="Amiri"/>
         <a:font script="Hebr" typeface="Arial"/>
         <a:font script="Thai" typeface="Cordia New"/>
         <a:font script="Ethi" typeface="Nyala"/>
